--- a/Bizora_Judges_Pitch_Deck.pptx
+++ b/Bizora_Judges_Pitch_Deck.pptx
@@ -12,6 +12,8 @@
     <p:sldId id="260" r:id="rId11"/>
     <p:sldId id="261" r:id="rId12"/>
     <p:sldId id="262" r:id="rId13"/>
+    <p:sldId id="263" r:id="rId14"/>
+    <p:sldId id="264" r:id="rId15"/>
   </p:sldIdLst>
   <p:sldSz cx="12191695" cy="6858000" type="screen4x3"/>
   <p:notesSz cx="6858000" cy="9144000"/>
@@ -3109,7 +3111,7 @@
             <a:avLst/>
           </a:prstGeom>
           <a:solidFill>
-            <a:srgbClr val="090D16"/>
+            <a:srgbClr val="0A0E17"/>
           </a:solidFill>
           <a:ln>
             <a:noFill/>
@@ -3139,14 +3141,57 @@
       </p:sp>
       <p:sp>
         <p:nvSpPr>
-          <p:cNvPr id="3" name="TextBox 2"/>
+          <p:cNvPr id="3" name="Rectangle 2"/>
+          <p:cNvSpPr/>
+          <p:nvPr/>
+        </p:nvSpPr>
+        <p:spPr>
+          <a:xfrm>
+            <a:off x="0" y="0"/>
+            <a:ext cx="12191695" cy="73152"/>
+          </a:xfrm>
+          <a:prstGeom prst="rect">
+            <a:avLst/>
+          </a:prstGeom>
+          <a:solidFill>
+            <a:srgbClr val="F59E0B"/>
+          </a:solidFill>
+          <a:ln>
+            <a:noFill/>
+          </a:ln>
+        </p:spPr>
+        <p:style>
+          <a:lnRef idx="1">
+            <a:schemeClr val="accent1"/>
+          </a:lnRef>
+          <a:fillRef idx="3">
+            <a:schemeClr val="accent1"/>
+          </a:fillRef>
+          <a:effectRef idx="2">
+            <a:schemeClr val="accent1"/>
+          </a:effectRef>
+          <a:fontRef idx="minor">
+            <a:schemeClr val="lt1"/>
+          </a:fontRef>
+        </p:style>
+        <p:txBody>
+          <a:bodyPr rtlCol="0" anchor="ctr"/>
+          <a:lstStyle/>
+          <a:p>
+            <a:pPr algn="ctr"/>
+          </a:p>
+        </p:txBody>
+      </p:sp>
+      <p:sp>
+        <p:nvSpPr>
+          <p:cNvPr id="4" name="TextBox 3"/>
           <p:cNvSpPr txBox="1"/>
           <p:nvPr/>
         </p:nvSpPr>
         <p:spPr>
           <a:xfrm>
-            <a:off x="914400" y="1645920"/>
-            <a:ext cx="10332720" cy="3474720"/>
+            <a:off x="731520" y="1097280"/>
+            <a:ext cx="6217920" cy="4754880"/>
           </a:xfrm>
           <a:prstGeom prst="rect">
             <a:avLst/>
@@ -3154,7 +3199,7 @@
           <a:noFill/>
         </p:spPr>
         <p:txBody>
-          <a:bodyPr wrap="none">
+          <a:bodyPr wrap="square">
             <a:spAutoFit/>
           </a:bodyPr>
           <a:lstStyle/>
@@ -3164,6 +3209,7 @@
                 <a:solidFill>
                   <a:srgbClr val="F59E0B"/>
                 </a:solidFill>
+                <a:latin typeface="Trebuchet MS"/>
               </a:defRPr>
             </a:pPr>
             <a:r>
@@ -3175,14 +3221,47 @@
               <a:spcBef>
                 <a:spcPts val="1200"/>
               </a:spcBef>
-              <a:defRPr sz="2400" b="1">
+              <a:defRPr sz="2200" b="1">
                 <a:solidFill>
                   <a:srgbClr val="F8FAFC"/>
                 </a:solidFill>
-              </a:defRPr>
-            </a:pPr>
-            <a:r>
-              <a:t>The Autonomous Retail Operating System &amp; Multi-Store ERP</a:t>
+                <a:latin typeface="Trebuchet MS"/>
+              </a:defRPr>
+            </a:pPr>
+            <a:r>
+              <a:t>Autonomous Retail Operating System for 13M Indian Kiranas</a:t>
+            </a:r>
+          </a:p>
+          <a:p>
+            <a:pPr>
+              <a:spcBef>
+                <a:spcPts val="1400"/>
+              </a:spcBef>
+              <a:defRPr sz="1400">
+                <a:solidFill>
+                  <a:srgbClr val="94A3B8"/>
+                </a:solidFill>
+                <a:latin typeface="Segoe UI"/>
+              </a:defRPr>
+            </a:pPr>
+            <a:r>
+              <a:t>Hardware-free camera barcode POS, automated WhatsApp receipts, and autonomous Hindi Voice AI restocking in one unified multi-portal ecosystem.</a:t>
+            </a:r>
+          </a:p>
+          <a:p>
+            <a:pPr>
+              <a:spcBef>
+                <a:spcPts val="2000"/>
+              </a:spcBef>
+              <a:defRPr sz="1200" b="1">
+                <a:solidFill>
+                  <a:srgbClr val="10B981"/>
+                </a:solidFill>
+                <a:latin typeface="Segoe UI"/>
+              </a:defRPr>
+            </a:pPr>
+            <a:r>
+              <a:t>● 100% Code Complete   ● Zero Hardware Cost   ● Live on Render</a:t>
             </a:r>
           </a:p>
           <a:p>
@@ -3190,33 +3269,43 @@
               <a:spcBef>
                 <a:spcPts val="1200"/>
               </a:spcBef>
-              <a:defRPr sz="1500">
-                <a:solidFill>
-                  <a:srgbClr val="94A3B8"/>
-                </a:solidFill>
-              </a:defRPr>
-            </a:pPr>
-            <a:r>
-              <a:t>Transforming 13 Million Indian Retail Kiranas with Camera POS, Voice AI Restocking, and 10-Minute Hyperlocal Delivery</a:t>
-            </a:r>
-          </a:p>
-          <a:p>
-            <a:pPr>
-              <a:spcBef>
-                <a:spcPts val="2400"/>
-              </a:spcBef>
-              <a:defRPr sz="1300">
+              <a:defRPr sz="1200" b="1">
                 <a:solidFill>
                   <a:srgbClr val="38BDF8"/>
                 </a:solidFill>
-              </a:defRPr>
-            </a:pPr>
-            <a:r>
-              <a:t>Live Deployments: bizora-owner.onrender.com | Founder: Om Khade</a:t>
-            </a:r>
-          </a:p>
-        </p:txBody>
-      </p:sp>
+                <a:latin typeface="Segoe UI"/>
+              </a:defRPr>
+            </a:pPr>
+            <a:r>
+              <a:t>Live Demo: https://bizora-owner.onrender.com  |  Founder: Om Khade</a:t>
+            </a:r>
+          </a:p>
+        </p:txBody>
+      </p:sp>
+      <p:pic>
+        <p:nvPicPr>
+          <p:cNvPr id="5" name="Picture 4" descr="bizora_launch_banner.jpg"/>
+          <p:cNvPicPr>
+            <a:picLocks noChangeAspect="1"/>
+          </p:cNvPicPr>
+          <p:nvPr/>
+        </p:nvPicPr>
+        <p:blipFill>
+          <a:blip r:embed="rId2"/>
+          <a:stretch>
+            <a:fillRect/>
+          </a:stretch>
+        </p:blipFill>
+        <p:spPr>
+          <a:xfrm>
+            <a:off x="7132320" y="1280160"/>
+            <a:ext cx="4297680" cy="2398705"/>
+          </a:xfrm>
+          <a:prstGeom prst="rect">
+            <a:avLst/>
+          </a:prstGeom>
+        </p:spPr>
+      </p:pic>
     </p:spTree>
   </p:cSld>
   <p:clrMapOvr>
@@ -3250,7 +3339,7 @@
             <a:avLst/>
           </a:prstGeom>
           <a:solidFill>
-            <a:srgbClr val="090D16"/>
+            <a:srgbClr val="0A0E17"/>
           </a:solidFill>
           <a:ln>
             <a:noFill/>
@@ -3280,95 +3369,23 @@
       </p:sp>
       <p:sp>
         <p:nvSpPr>
-          <p:cNvPr id="3" name="TextBox 2"/>
-          <p:cNvSpPr txBox="1"/>
+          <p:cNvPr id="3" name="Rectangle 2"/>
+          <p:cNvSpPr/>
           <p:nvPr/>
         </p:nvSpPr>
         <p:spPr>
           <a:xfrm>
-            <a:off x="731520" y="365760"/>
-            <a:ext cx="10515600" cy="320040"/>
+            <a:off x="0" y="0"/>
+            <a:ext cx="12191695" cy="73152"/>
           </a:xfrm>
           <a:prstGeom prst="rect">
             <a:avLst/>
           </a:prstGeom>
-          <a:noFill/>
-        </p:spPr>
-        <p:txBody>
-          <a:bodyPr wrap="none">
-            <a:spAutoFit/>
-          </a:bodyPr>
-          <a:lstStyle/>
-          <a:p>
-            <a:pPr>
-              <a:defRPr sz="1100" b="1">
-                <a:solidFill>
-                  <a:srgbClr val="38BDF8"/>
-                </a:solidFill>
-              </a:defRPr>
-            </a:pPr>
-            <a:r>
-              <a:t>BIZORA AI — PITCH DECK</a:t>
-            </a:r>
-          </a:p>
-        </p:txBody>
-      </p:sp>
-      <p:sp>
-        <p:nvSpPr>
-          <p:cNvPr id="4" name="TextBox 3"/>
-          <p:cNvSpPr txBox="1"/>
-          <p:nvPr/>
-        </p:nvSpPr>
-        <p:spPr>
-          <a:xfrm>
-            <a:off x="731520" y="640080"/>
-            <a:ext cx="10515600" cy="731520"/>
-          </a:xfrm>
-          <a:prstGeom prst="rect">
-            <a:avLst/>
-          </a:prstGeom>
-          <a:noFill/>
-        </p:spPr>
-        <p:txBody>
-          <a:bodyPr wrap="none">
-            <a:spAutoFit/>
-          </a:bodyPr>
-          <a:lstStyle/>
-          <a:p>
-            <a:pPr>
-              <a:defRPr sz="2800" b="1">
-                <a:solidFill>
-                  <a:srgbClr val="F8FAFC"/>
-                </a:solidFill>
-              </a:defRPr>
-            </a:pPr>
-            <a:r>
-              <a:t>The Reality of Indian Retail: Massive Market, Broken Operations</a:t>
-            </a:r>
-          </a:p>
-        </p:txBody>
-      </p:sp>
-      <p:sp>
-        <p:nvSpPr>
-          <p:cNvPr id="5" name="Rounded Rectangle 4"/>
-          <p:cNvSpPr/>
-          <p:nvPr/>
-        </p:nvSpPr>
-        <p:spPr>
-          <a:xfrm>
-            <a:off x="731520" y="1645920"/>
-            <a:ext cx="5120640" cy="2011680"/>
-          </a:xfrm>
-          <a:prstGeom prst="roundRect">
-            <a:avLst/>
-          </a:prstGeom>
           <a:solidFill>
-            <a:srgbClr val="0F172A"/>
+            <a:srgbClr val="F59E0B"/>
           </a:solidFill>
           <a:ln>
-            <a:solidFill>
-              <a:srgbClr val="F59E0B"/>
-            </a:solidFill>
+            <a:noFill/>
           </a:ln>
         </p:spPr>
         <p:style>
@@ -3389,30 +3406,78 @@
           <a:bodyPr rtlCol="0" anchor="ctr"/>
           <a:lstStyle/>
           <a:p>
-            <a:pPr algn="ctr">
-              <a:defRPr sz="1800" b="1">
-                <a:solidFill>
-                  <a:srgbClr val="F59E0B"/>
-                </a:solidFill>
-              </a:defRPr>
-            </a:pPr>
-            <a:r>
-              <a:t>4.2% Inventory Shrinkage</a:t>
-            </a:r>
-          </a:p>
+            <a:pPr algn="ctr"/>
+          </a:p>
+        </p:txBody>
+      </p:sp>
+      <p:sp>
+        <p:nvSpPr>
+          <p:cNvPr id="4" name="TextBox 3"/>
+          <p:cNvSpPr txBox="1"/>
+          <p:nvPr/>
+        </p:nvSpPr>
+        <p:spPr>
+          <a:xfrm>
+            <a:off x="731520" y="365760"/>
+            <a:ext cx="10698480" cy="274320"/>
+          </a:xfrm>
+          <a:prstGeom prst="rect">
+            <a:avLst/>
+          </a:prstGeom>
+          <a:noFill/>
+        </p:spPr>
+        <p:txBody>
+          <a:bodyPr wrap="square">
+            <a:spAutoFit/>
+          </a:bodyPr>
+          <a:lstStyle/>
           <a:p>
             <a:pPr>
-              <a:spcBef>
-                <a:spcPts val="800"/>
-              </a:spcBef>
-              <a:defRPr sz="1300">
-                <a:solidFill>
-                  <a:srgbClr val="94A3B8"/>
-                </a:solidFill>
-              </a:defRPr>
-            </a:pPr>
-            <a:r>
-              <a:t>Unmonitored expiry dates and stock leaks cost the average Indian store ₹35,000+ monthly.</a:t>
+              <a:defRPr sz="1000" b="1">
+                <a:solidFill>
+                  <a:srgbClr val="38BDF8"/>
+                </a:solidFill>
+                <a:latin typeface="Segoe UI"/>
+              </a:defRPr>
+            </a:pPr>
+            <a:r>
+              <a:t>THE PROBLEM</a:t>
+            </a:r>
+          </a:p>
+        </p:txBody>
+      </p:sp>
+      <p:sp>
+        <p:nvSpPr>
+          <p:cNvPr id="5" name="TextBox 4"/>
+          <p:cNvSpPr txBox="1"/>
+          <p:nvPr/>
+        </p:nvSpPr>
+        <p:spPr>
+          <a:xfrm>
+            <a:off x="731520" y="621792"/>
+            <a:ext cx="10698480" cy="640080"/>
+          </a:xfrm>
+          <a:prstGeom prst="rect">
+            <a:avLst/>
+          </a:prstGeom>
+          <a:noFill/>
+        </p:spPr>
+        <p:txBody>
+          <a:bodyPr wrap="square">
+            <a:spAutoFit/>
+          </a:bodyPr>
+          <a:lstStyle/>
+          <a:p>
+            <a:pPr>
+              <a:defRPr sz="2600" b="1">
+                <a:solidFill>
+                  <a:srgbClr val="F8FAFC"/>
+                </a:solidFill>
+                <a:latin typeface="Trebuchet MS"/>
+              </a:defRPr>
+            </a:pPr>
+            <a:r>
+              <a:t>The Crisis in Indian Retail: $1.1T Market Operating on Paper</a:t>
             </a:r>
           </a:p>
         </p:txBody>
@@ -3425,14 +3490,227 @@
         </p:nvSpPr>
         <p:spPr>
           <a:xfrm>
-            <a:off x="6126480" y="1645920"/>
-            <a:ext cx="5120640" cy="2011680"/>
+            <a:off x="731520" y="1645920"/>
+            <a:ext cx="3474720" cy="3474720"/>
           </a:xfrm>
           <a:prstGeom prst="roundRect">
             <a:avLst/>
           </a:prstGeom>
           <a:solidFill>
-            <a:srgbClr val="0F172A"/>
+            <a:srgbClr val="101828"/>
+          </a:solidFill>
+          <a:ln w="19050">
+            <a:solidFill>
+              <a:srgbClr val="EF4444"/>
+            </a:solidFill>
+          </a:ln>
+        </p:spPr>
+        <p:style>
+          <a:lnRef idx="1">
+            <a:schemeClr val="accent1"/>
+          </a:lnRef>
+          <a:fillRef idx="3">
+            <a:schemeClr val="accent1"/>
+          </a:fillRef>
+          <a:effectRef idx="2">
+            <a:schemeClr val="accent1"/>
+          </a:effectRef>
+          <a:fontRef idx="minor">
+            <a:schemeClr val="lt1"/>
+          </a:fontRef>
+        </p:style>
+        <p:txBody>
+          <a:bodyPr rtlCol="0" anchor="ctr" wrap="square"/>
+          <a:lstStyle/>
+          <a:p>
+            <a:pPr algn="ctr">
+              <a:defRPr sz="1900" b="1">
+                <a:solidFill>
+                  <a:srgbClr val="EF4444"/>
+                </a:solidFill>
+                <a:latin typeface="Trebuchet MS"/>
+              </a:defRPr>
+            </a:pPr>
+            <a:r>
+              <a:t>₹35,000+ Monthly Shrinkage</a:t>
+            </a:r>
+          </a:p>
+          <a:p>
+            <a:pPr>
+              <a:spcBef>
+                <a:spcPts val="1200"/>
+              </a:spcBef>
+              <a:defRPr sz="1300">
+                <a:solidFill>
+                  <a:srgbClr val="94A3B8"/>
+                </a:solidFill>
+                <a:latin typeface="Segoe UI"/>
+              </a:defRPr>
+            </a:pPr>
+            <a:r>
+              <a:t>Perishables expire on shelves unnoticed due to zero FIFO batch tracking. Retailers lose 4.2% of gross margins to silent spoilage.</a:t>
+            </a:r>
+          </a:p>
+        </p:txBody>
+      </p:sp>
+      <p:sp>
+        <p:nvSpPr>
+          <p:cNvPr id="7" name="Rounded Rectangle 6"/>
+          <p:cNvSpPr/>
+          <p:nvPr/>
+        </p:nvSpPr>
+        <p:spPr>
+          <a:xfrm>
+            <a:off x="4343400" y="1645920"/>
+            <a:ext cx="3474720" cy="3474720"/>
+          </a:xfrm>
+          <a:prstGeom prst="roundRect">
+            <a:avLst/>
+          </a:prstGeom>
+          <a:solidFill>
+            <a:srgbClr val="101828"/>
+          </a:solidFill>
+          <a:ln w="19050">
+            <a:solidFill>
+              <a:srgbClr val="F59E0B"/>
+            </a:solidFill>
+          </a:ln>
+        </p:spPr>
+        <p:style>
+          <a:lnRef idx="1">
+            <a:schemeClr val="accent1"/>
+          </a:lnRef>
+          <a:fillRef idx="3">
+            <a:schemeClr val="accent1"/>
+          </a:fillRef>
+          <a:effectRef idx="2">
+            <a:schemeClr val="accent1"/>
+          </a:effectRef>
+          <a:fontRef idx="minor">
+            <a:schemeClr val="lt1"/>
+          </a:fontRef>
+        </p:style>
+        <p:txBody>
+          <a:bodyPr rtlCol="0" anchor="ctr" wrap="square"/>
+          <a:lstStyle/>
+          <a:p>
+            <a:pPr algn="ctr">
+              <a:defRPr sz="1900" b="1">
+                <a:solidFill>
+                  <a:srgbClr val="F59E0B"/>
+                </a:solidFill>
+                <a:latin typeface="Trebuchet MS"/>
+              </a:defRPr>
+            </a:pPr>
+            <a:r>
+              <a:t>₹45,000 Hardware Cost Barrier</a:t>
+            </a:r>
+          </a:p>
+          <a:p>
+            <a:pPr>
+              <a:spcBef>
+                <a:spcPts val="1200"/>
+              </a:spcBef>
+              <a:defRPr sz="1300">
+                <a:solidFill>
+                  <a:srgbClr val="94A3B8"/>
+                </a:solidFill>
+                <a:latin typeface="Segoe UI"/>
+              </a:defRPr>
+            </a:pPr>
+            <a:r>
+              <a:t>Traditional ERPs (Tally, Busy) demand bulky desktop computers, barcode laser guns, and UPS power backups that small kiranas cannot afford.</a:t>
+            </a:r>
+          </a:p>
+        </p:txBody>
+      </p:sp>
+      <p:sp>
+        <p:nvSpPr>
+          <p:cNvPr id="8" name="Rounded Rectangle 7"/>
+          <p:cNvSpPr/>
+          <p:nvPr/>
+        </p:nvSpPr>
+        <p:spPr>
+          <a:xfrm>
+            <a:off x="7955280" y="1645920"/>
+            <a:ext cx="3474720" cy="3474720"/>
+          </a:xfrm>
+          <a:prstGeom prst="roundRect">
+            <a:avLst/>
+          </a:prstGeom>
+          <a:solidFill>
+            <a:srgbClr val="101828"/>
+          </a:solidFill>
+          <a:ln w="19050">
+            <a:solidFill>
+              <a:srgbClr val="38BDF8"/>
+            </a:solidFill>
+          </a:ln>
+        </p:spPr>
+        <p:style>
+          <a:lnRef idx="1">
+            <a:schemeClr val="accent1"/>
+          </a:lnRef>
+          <a:fillRef idx="3">
+            <a:schemeClr val="accent1"/>
+          </a:fillRef>
+          <a:effectRef idx="2">
+            <a:schemeClr val="accent1"/>
+          </a:effectRef>
+          <a:fontRef idx="minor">
+            <a:schemeClr val="lt1"/>
+          </a:fontRef>
+        </p:style>
+        <p:txBody>
+          <a:bodyPr rtlCol="0" anchor="ctr" wrap="square"/>
+          <a:lstStyle/>
+          <a:p>
+            <a:pPr algn="ctr">
+              <a:defRPr sz="1900" b="1">
+                <a:solidFill>
+                  <a:srgbClr val="38BDF8"/>
+                </a:solidFill>
+                <a:latin typeface="Trebuchet MS"/>
+              </a:defRPr>
+            </a:pPr>
+            <a:r>
+              <a:t>Quick-Commerce Disruption</a:t>
+            </a:r>
+          </a:p>
+          <a:p>
+            <a:pPr>
+              <a:spcBef>
+                <a:spcPts val="1200"/>
+              </a:spcBef>
+              <a:defRPr sz="1300">
+                <a:solidFill>
+                  <a:srgbClr val="94A3B8"/>
+                </a:solidFill>
+                <a:latin typeface="Segoe UI"/>
+              </a:defRPr>
+            </a:pPr>
+            <a:r>
+              <a:t>Blinkit and Zepto are pulling urban shoppers away with 10-minute delivery. Local store owners have zero online catalog or delivery presence.</a:t>
+            </a:r>
+          </a:p>
+        </p:txBody>
+      </p:sp>
+      <p:sp>
+        <p:nvSpPr>
+          <p:cNvPr id="9" name="Rounded Rectangle 8"/>
+          <p:cNvSpPr/>
+          <p:nvPr/>
+        </p:nvSpPr>
+        <p:spPr>
+          <a:xfrm>
+            <a:off x="731520" y="5394960"/>
+            <a:ext cx="10698480" cy="914400"/>
+          </a:xfrm>
+          <a:prstGeom prst="roundRect">
+            <a:avLst/>
+          </a:prstGeom>
+          <a:solidFill>
+            <a:srgbClr val="182238"/>
           </a:solidFill>
           <a:ln>
             <a:solidFill>
@@ -3455,171 +3733,19 @@
           </a:fontRef>
         </p:style>
         <p:txBody>
-          <a:bodyPr rtlCol="0" anchor="ctr"/>
+          <a:bodyPr rtlCol="0" anchor="ctr" wrap="square"/>
           <a:lstStyle/>
           <a:p>
             <a:pPr algn="ctr">
-              <a:defRPr sz="1800" b="1">
+              <a:defRPr sz="1350" b="1">
                 <a:solidFill>
                   <a:srgbClr val="F8FAFC"/>
                 </a:solidFill>
-              </a:defRPr>
-            </a:pPr>
-            <a:r>
-              <a:t>Hardware Cost Barrier</a:t>
-            </a:r>
-          </a:p>
-          <a:p>
-            <a:pPr>
-              <a:spcBef>
-                <a:spcPts val="800"/>
-              </a:spcBef>
-              <a:defRPr sz="1300">
-                <a:solidFill>
-                  <a:srgbClr val="94A3B8"/>
-                </a:solidFill>
-              </a:defRPr>
-            </a:pPr>
-            <a:r>
-              <a:t>Traditional ERPs demand ₹45,000+ in bulky POS hardware, barcode laser guns, and desktop setups.</a:t>
-            </a:r>
-          </a:p>
-        </p:txBody>
-      </p:sp>
-      <p:sp>
-        <p:nvSpPr>
-          <p:cNvPr id="7" name="Rounded Rectangle 6"/>
-          <p:cNvSpPr/>
-          <p:nvPr/>
-        </p:nvSpPr>
-        <p:spPr>
-          <a:xfrm>
-            <a:off x="731520" y="3931920"/>
-            <a:ext cx="5120640" cy="2011680"/>
-          </a:xfrm>
-          <a:prstGeom prst="roundRect">
-            <a:avLst/>
-          </a:prstGeom>
-          <a:solidFill>
-            <a:srgbClr val="0F172A"/>
-          </a:solidFill>
-          <a:ln>
-            <a:solidFill>
-              <a:srgbClr val="1E293B"/>
-            </a:solidFill>
-          </a:ln>
-        </p:spPr>
-        <p:style>
-          <a:lnRef idx="1">
-            <a:schemeClr val="accent1"/>
-          </a:lnRef>
-          <a:fillRef idx="3">
-            <a:schemeClr val="accent1"/>
-          </a:fillRef>
-          <a:effectRef idx="2">
-            <a:schemeClr val="accent1"/>
-          </a:effectRef>
-          <a:fontRef idx="minor">
-            <a:schemeClr val="lt1"/>
-          </a:fontRef>
-        </p:style>
-        <p:txBody>
-          <a:bodyPr rtlCol="0" anchor="ctr"/>
-          <a:lstStyle/>
-          <a:p>
-            <a:pPr algn="ctr">
-              <a:defRPr sz="1800" b="1">
-                <a:solidFill>
-                  <a:srgbClr val="F8FAFC"/>
-                </a:solidFill>
-              </a:defRPr>
-            </a:pPr>
-            <a:r>
-              <a:t>Chaotic Vendor Ordering</a:t>
-            </a:r>
-          </a:p>
-          <a:p>
-            <a:pPr>
-              <a:spcBef>
-                <a:spcPts val="800"/>
-              </a:spcBef>
-              <a:defRPr sz="1300">
-                <a:solidFill>
-                  <a:srgbClr val="94A3B8"/>
-                </a:solidFill>
-              </a:defRPr>
-            </a:pPr>
-            <a:r>
-              <a:t>Shopkeepers spend 2-3 hours daily on fragmented phone calls and lost WhatsApp notes to distributors.</a:t>
-            </a:r>
-          </a:p>
-        </p:txBody>
-      </p:sp>
-      <p:sp>
-        <p:nvSpPr>
-          <p:cNvPr id="8" name="Rounded Rectangle 7"/>
-          <p:cNvSpPr/>
-          <p:nvPr/>
-        </p:nvSpPr>
-        <p:spPr>
-          <a:xfrm>
-            <a:off x="6126480" y="3931920"/>
-            <a:ext cx="5120640" cy="2011680"/>
-          </a:xfrm>
-          <a:prstGeom prst="roundRect">
-            <a:avLst/>
-          </a:prstGeom>
-          <a:solidFill>
-            <a:srgbClr val="0F172A"/>
-          </a:solidFill>
-          <a:ln>
-            <a:solidFill>
-              <a:srgbClr val="1E293B"/>
-            </a:solidFill>
-          </a:ln>
-        </p:spPr>
-        <p:style>
-          <a:lnRef idx="1">
-            <a:schemeClr val="accent1"/>
-          </a:lnRef>
-          <a:fillRef idx="3">
-            <a:schemeClr val="accent1"/>
-          </a:fillRef>
-          <a:effectRef idx="2">
-            <a:schemeClr val="accent1"/>
-          </a:effectRef>
-          <a:fontRef idx="minor">
-            <a:schemeClr val="lt1"/>
-          </a:fontRef>
-        </p:style>
-        <p:txBody>
-          <a:bodyPr rtlCol="0" anchor="ctr"/>
-          <a:lstStyle/>
-          <a:p>
-            <a:pPr algn="ctr">
-              <a:defRPr sz="1800" b="1">
-                <a:solidFill>
-                  <a:srgbClr val="F8FAFC"/>
-                </a:solidFill>
-              </a:defRPr>
-            </a:pPr>
-            <a:r>
-              <a:t>Losing to Quick-Commerce</a:t>
-            </a:r>
-          </a:p>
-          <a:p>
-            <a:pPr>
-              <a:spcBef>
-                <a:spcPts val="800"/>
-              </a:spcBef>
-              <a:defRPr sz="1300">
-                <a:solidFill>
-                  <a:srgbClr val="94A3B8"/>
-                </a:solidFill>
-              </a:defRPr>
-            </a:pPr>
-            <a:r>
-              <a:t>Blinkit and Zepto pull consumers away; local kiranas have zero neighborhood online ordering presence.</a:t>
+                <a:latin typeface="Segoe UI"/>
+              </a:defRPr>
+            </a:pPr>
+            <a:r>
+              <a:t>💡 The Bottom Line: Over 90% of India's retail commerce is powered by 13 million neighborhood stores, yet 95% run on manual calculators and paper diaries.</a:t>
             </a:r>
           </a:p>
         </p:txBody>
@@ -3657,7 +3783,7 @@
             <a:avLst/>
           </a:prstGeom>
           <a:solidFill>
-            <a:srgbClr val="090D16"/>
+            <a:srgbClr val="0A0E17"/>
           </a:solidFill>
           <a:ln>
             <a:noFill/>
@@ -3687,95 +3813,23 @@
       </p:sp>
       <p:sp>
         <p:nvSpPr>
-          <p:cNvPr id="3" name="TextBox 2"/>
-          <p:cNvSpPr txBox="1"/>
+          <p:cNvPr id="3" name="Rectangle 2"/>
+          <p:cNvSpPr/>
           <p:nvPr/>
         </p:nvSpPr>
         <p:spPr>
           <a:xfrm>
-            <a:off x="731520" y="365760"/>
-            <a:ext cx="10515600" cy="320040"/>
+            <a:off x="0" y="0"/>
+            <a:ext cx="12191695" cy="73152"/>
           </a:xfrm>
           <a:prstGeom prst="rect">
             <a:avLst/>
           </a:prstGeom>
-          <a:noFill/>
-        </p:spPr>
-        <p:txBody>
-          <a:bodyPr wrap="none">
-            <a:spAutoFit/>
-          </a:bodyPr>
-          <a:lstStyle/>
-          <a:p>
-            <a:pPr>
-              <a:defRPr sz="1100" b="1">
-                <a:solidFill>
-                  <a:srgbClr val="38BDF8"/>
-                </a:solidFill>
-              </a:defRPr>
-            </a:pPr>
-            <a:r>
-              <a:t>BIZORA AI — PITCH DECK</a:t>
-            </a:r>
-          </a:p>
-        </p:txBody>
-      </p:sp>
-      <p:sp>
-        <p:nvSpPr>
-          <p:cNvPr id="4" name="TextBox 3"/>
-          <p:cNvSpPr txBox="1"/>
-          <p:nvPr/>
-        </p:nvSpPr>
-        <p:spPr>
-          <a:xfrm>
-            <a:off x="731520" y="640080"/>
-            <a:ext cx="10515600" cy="731520"/>
-          </a:xfrm>
-          <a:prstGeom prst="rect">
-            <a:avLst/>
-          </a:prstGeom>
-          <a:noFill/>
-        </p:spPr>
-        <p:txBody>
-          <a:bodyPr wrap="none">
-            <a:spAutoFit/>
-          </a:bodyPr>
-          <a:lstStyle/>
-          <a:p>
-            <a:pPr>
-              <a:defRPr sz="2800" b="1">
-                <a:solidFill>
-                  <a:srgbClr val="F8FAFC"/>
-                </a:solidFill>
-              </a:defRPr>
-            </a:pPr>
-            <a:r>
-              <a:t>Bizora AI: The Complete Autonomous Operating System</a:t>
-            </a:r>
-          </a:p>
-        </p:txBody>
-      </p:sp>
-      <p:sp>
-        <p:nvSpPr>
-          <p:cNvPr id="5" name="Rounded Rectangle 4"/>
-          <p:cNvSpPr/>
-          <p:nvPr/>
-        </p:nvSpPr>
-        <p:spPr>
-          <a:xfrm>
-            <a:off x="731520" y="1645920"/>
-            <a:ext cx="5120640" cy="2011680"/>
-          </a:xfrm>
-          <a:prstGeom prst="roundRect">
-            <a:avLst/>
-          </a:prstGeom>
           <a:solidFill>
-            <a:srgbClr val="0F172A"/>
+            <a:srgbClr val="F59E0B"/>
           </a:solidFill>
           <a:ln>
-            <a:solidFill>
-              <a:srgbClr val="38BDF8"/>
-            </a:solidFill>
+            <a:noFill/>
           </a:ln>
         </p:spPr>
         <p:style>
@@ -3796,15 +3850,133 @@
           <a:bodyPr rtlCol="0" anchor="ctr"/>
           <a:lstStyle/>
           <a:p>
+            <a:pPr algn="ctr"/>
+          </a:p>
+        </p:txBody>
+      </p:sp>
+      <p:sp>
+        <p:nvSpPr>
+          <p:cNvPr id="4" name="TextBox 3"/>
+          <p:cNvSpPr txBox="1"/>
+          <p:nvPr/>
+        </p:nvSpPr>
+        <p:spPr>
+          <a:xfrm>
+            <a:off x="731520" y="365760"/>
+            <a:ext cx="10698480" cy="274320"/>
+          </a:xfrm>
+          <a:prstGeom prst="rect">
+            <a:avLst/>
+          </a:prstGeom>
+          <a:noFill/>
+        </p:spPr>
+        <p:txBody>
+          <a:bodyPr wrap="square">
+            <a:spAutoFit/>
+          </a:bodyPr>
+          <a:lstStyle/>
+          <a:p>
+            <a:pPr>
+              <a:defRPr sz="1000" b="1">
+                <a:solidFill>
+                  <a:srgbClr val="38BDF8"/>
+                </a:solidFill>
+                <a:latin typeface="Segoe UI"/>
+              </a:defRPr>
+            </a:pPr>
+            <a:r>
+              <a:t>THE SOLUTION</a:t>
+            </a:r>
+          </a:p>
+        </p:txBody>
+      </p:sp>
+      <p:sp>
+        <p:nvSpPr>
+          <p:cNvPr id="5" name="TextBox 4"/>
+          <p:cNvSpPr txBox="1"/>
+          <p:nvPr/>
+        </p:nvSpPr>
+        <p:spPr>
+          <a:xfrm>
+            <a:off x="731520" y="621792"/>
+            <a:ext cx="10698480" cy="640080"/>
+          </a:xfrm>
+          <a:prstGeom prst="rect">
+            <a:avLst/>
+          </a:prstGeom>
+          <a:noFill/>
+        </p:spPr>
+        <p:txBody>
+          <a:bodyPr wrap="square">
+            <a:spAutoFit/>
+          </a:bodyPr>
+          <a:lstStyle/>
+          <a:p>
+            <a:pPr>
+              <a:defRPr sz="2600" b="1">
+                <a:solidFill>
+                  <a:srgbClr val="F8FAFC"/>
+                </a:solidFill>
+                <a:latin typeface="Trebuchet MS"/>
+              </a:defRPr>
+            </a:pPr>
+            <a:r>
+              <a:t>Bizora AI: The Complete Autonomous Retail Solution</a:t>
+            </a:r>
+          </a:p>
+        </p:txBody>
+      </p:sp>
+      <p:sp>
+        <p:nvSpPr>
+          <p:cNvPr id="6" name="Rounded Rectangle 5"/>
+          <p:cNvSpPr/>
+          <p:nvPr/>
+        </p:nvSpPr>
+        <p:spPr>
+          <a:xfrm>
+            <a:off x="731520" y="1645920"/>
+            <a:ext cx="5120640" cy="2011680"/>
+          </a:xfrm>
+          <a:prstGeom prst="roundRect">
+            <a:avLst/>
+          </a:prstGeom>
+          <a:solidFill>
+            <a:srgbClr val="101828"/>
+          </a:solidFill>
+          <a:ln w="19050">
+            <a:solidFill>
+              <a:srgbClr val="F59E0B"/>
+            </a:solidFill>
+          </a:ln>
+        </p:spPr>
+        <p:style>
+          <a:lnRef idx="1">
+            <a:schemeClr val="accent1"/>
+          </a:lnRef>
+          <a:fillRef idx="3">
+            <a:schemeClr val="accent1"/>
+          </a:fillRef>
+          <a:effectRef idx="2">
+            <a:schemeClr val="accent1"/>
+          </a:effectRef>
+          <a:fontRef idx="minor">
+            <a:schemeClr val="lt1"/>
+          </a:fontRef>
+        </p:style>
+        <p:txBody>
+          <a:bodyPr rtlCol="0" anchor="ctr" wrap="square"/>
+          <a:lstStyle/>
+          <a:p>
             <a:pPr algn="ctr">
               <a:defRPr sz="1800" b="1">
                 <a:solidFill>
-                  <a:srgbClr val="38BDF8"/>
-                </a:solidFill>
-              </a:defRPr>
-            </a:pPr>
-            <a:r>
-              <a:t>Hardware-Free Camera POS</a:t>
+                  <a:srgbClr val="F59E0B"/>
+                </a:solidFill>
+                <a:latin typeface="Trebuchet MS"/>
+              </a:defRPr>
+            </a:pPr>
+            <a:r>
+              <a:t>⚡ Camera Barcode POS</a:t>
             </a:r>
           </a:p>
           <a:p>
@@ -3816,17 +3988,18 @@
                 <a:solidFill>
                   <a:srgbClr val="94A3B8"/>
                 </a:solidFill>
-              </a:defRPr>
-            </a:pPr>
-            <a:r>
-              <a:t>Turns any smartphone or tablet camera into an instant barcode billing terminal in 60 seconds.</a:t>
-            </a:r>
-          </a:p>
-        </p:txBody>
-      </p:sp>
-      <p:sp>
-        <p:nvSpPr>
-          <p:cNvPr id="6" name="Rounded Rectangle 5"/>
+                <a:latin typeface="Segoe UI"/>
+              </a:defRPr>
+            </a:pPr>
+            <a:r>
+              <a:t>Turns any smartphone or tablet camera into an ultra-fast barcode checkout terminal in 60 seconds. Zero expensive scanner guns needed.</a:t>
+            </a:r>
+          </a:p>
+        </p:txBody>
+      </p:sp>
+      <p:sp>
+        <p:nvSpPr>
+          <p:cNvPr id="7" name="Rounded Rectangle 6"/>
           <p:cNvSpPr/>
           <p:nvPr/>
         </p:nvSpPr>
@@ -3839,9 +4012,9 @@
             <a:avLst/>
           </a:prstGeom>
           <a:solidFill>
-            <a:srgbClr val="0F172A"/>
+            <a:srgbClr val="101828"/>
           </a:solidFill>
-          <a:ln>
+          <a:ln w="19050">
             <a:solidFill>
               <a:srgbClr val="1E293B"/>
             </a:solidFill>
@@ -3862,7 +4035,7 @@
           </a:fontRef>
         </p:style>
         <p:txBody>
-          <a:bodyPr rtlCol="0" anchor="ctr"/>
+          <a:bodyPr rtlCol="0" anchor="ctr" wrap="square"/>
           <a:lstStyle/>
           <a:p>
             <a:pPr algn="ctr">
@@ -3870,10 +4043,11 @@
                 <a:solidFill>
                   <a:srgbClr val="F8FAFC"/>
                 </a:solidFill>
-              </a:defRPr>
-            </a:pPr>
-            <a:r>
-              <a:t>FIFO Expiry &amp; Markdown Radar</a:t>
+                <a:latin typeface="Trebuchet MS"/>
+              </a:defRPr>
+            </a:pPr>
+            <a:r>
+              <a:t>📱 1-Tap WhatsApp Receipts</a:t>
             </a:r>
           </a:p>
           <a:p>
@@ -3885,17 +4059,18 @@
                 <a:solidFill>
                   <a:srgbClr val="94A3B8"/>
                 </a:solidFill>
-              </a:defRPr>
-            </a:pPr>
-            <a:r>
-              <a:t>Proactively identifies goods nearing expiry 15 days out and automates discount markdowns to prevent loss.</a:t>
-            </a:r>
-          </a:p>
-        </p:txBody>
-      </p:sp>
-      <p:sp>
-        <p:nvSpPr>
-          <p:cNvPr id="7" name="Rounded Rectangle 6"/>
+                <a:latin typeface="Segoe UI"/>
+              </a:defRPr>
+            </a:pPr>
+            <a:r>
+              <a:t>Itemized digital invoices sent instantly to customer WhatsApp. Saves up to ₹1,800/mo on physical thermal paper rolls.</a:t>
+            </a:r>
+          </a:p>
+        </p:txBody>
+      </p:sp>
+      <p:sp>
+        <p:nvSpPr>
+          <p:cNvPr id="8" name="Rounded Rectangle 7"/>
           <p:cNvSpPr/>
           <p:nvPr/>
         </p:nvSpPr>
@@ -3908,9 +4083,9 @@
             <a:avLst/>
           </a:prstGeom>
           <a:solidFill>
-            <a:srgbClr val="0F172A"/>
+            <a:srgbClr val="101828"/>
           </a:solidFill>
-          <a:ln>
+          <a:ln w="19050">
             <a:solidFill>
               <a:srgbClr val="1E293B"/>
             </a:solidFill>
@@ -3931,7 +4106,7 @@
           </a:fontRef>
         </p:style>
         <p:txBody>
-          <a:bodyPr rtlCol="0" anchor="ctr"/>
+          <a:bodyPr rtlCol="0" anchor="ctr" wrap="square"/>
           <a:lstStyle/>
           <a:p>
             <a:pPr algn="ctr">
@@ -3939,10 +4114,11 @@
                 <a:solidFill>
                   <a:srgbClr val="F8FAFC"/>
                 </a:solidFill>
-              </a:defRPr>
-            </a:pPr>
-            <a:r>
-              <a:t>Vapi AI Autonomous Calling</a:t>
+                <a:latin typeface="Trebuchet MS"/>
+              </a:defRPr>
+            </a:pPr>
+            <a:r>
+              <a:t>🤖 Hindi Voice AI Restocking</a:t>
             </a:r>
           </a:p>
           <a:p>
@@ -3954,17 +4130,18 @@
                 <a:solidFill>
                   <a:srgbClr val="94A3B8"/>
                 </a:solidFill>
-              </a:defRPr>
-            </a:pPr>
-            <a:r>
-              <a:t>Conversational AI voice agents call suppliers directly in natural Hindi and English to reorder low stock.</a:t>
-            </a:r>
-          </a:p>
-        </p:txBody>
-      </p:sp>
-      <p:sp>
-        <p:nvSpPr>
-          <p:cNvPr id="8" name="Rounded Rectangle 7"/>
+                <a:latin typeface="Segoe UI"/>
+              </a:defRPr>
+            </a:pPr>
+            <a:r>
+              <a:t>Conversational AI voice agents call distributors directly in natural Hindi and English to reorder goods before stockouts occur.</a:t>
+            </a:r>
+          </a:p>
+        </p:txBody>
+      </p:sp>
+      <p:sp>
+        <p:nvSpPr>
+          <p:cNvPr id="9" name="Rounded Rectangle 8"/>
           <p:cNvSpPr/>
           <p:nvPr/>
         </p:nvSpPr>
@@ -3977,9 +4154,9 @@
             <a:avLst/>
           </a:prstGeom>
           <a:solidFill>
-            <a:srgbClr val="0F172A"/>
+            <a:srgbClr val="101828"/>
           </a:solidFill>
-          <a:ln>
+          <a:ln w="19050">
             <a:solidFill>
               <a:srgbClr val="1E293B"/>
             </a:solidFill>
@@ -4000,7 +4177,7 @@
           </a:fontRef>
         </p:style>
         <p:txBody>
-          <a:bodyPr rtlCol="0" anchor="ctr"/>
+          <a:bodyPr rtlCol="0" anchor="ctr" wrap="square"/>
           <a:lstStyle/>
           <a:p>
             <a:pPr algn="ctr">
@@ -4008,10 +4185,11 @@
                 <a:solidFill>
                   <a:srgbClr val="F8FAFC"/>
                 </a:solidFill>
-              </a:defRPr>
-            </a:pPr>
-            <a:r>
-              <a:t>Hyperlocal Customer Storefront</a:t>
+                <a:latin typeface="Trebuchet MS"/>
+              </a:defRPr>
+            </a:pPr>
+            <a:r>
+              <a:t>🛍️ 10-Min Hyperlocal Storefront</a:t>
             </a:r>
           </a:p>
           <a:p>
@@ -4023,10 +4201,11 @@
                 <a:solidFill>
                   <a:srgbClr val="94A3B8"/>
                 </a:solidFill>
-              </a:defRPr>
-            </a:pPr>
-            <a:r>
-              <a:t>Every shop gets an instant neighborhood online storefront. Customers order online for 10-minute delivery.</a:t>
+                <a:latin typeface="Segoe UI"/>
+              </a:defRPr>
+            </a:pPr>
+            <a:r>
+              <a:t>Every shopkeeper gets an instant neighborhood online storefront. Local customers order online, store fulfills in 10 minutes.</a:t>
             </a:r>
           </a:p>
         </p:txBody>
@@ -4064,7 +4243,7 @@
             <a:avLst/>
           </a:prstGeom>
           <a:solidFill>
-            <a:srgbClr val="090D16"/>
+            <a:srgbClr val="0A0E17"/>
           </a:solidFill>
           <a:ln>
             <a:noFill/>
@@ -4094,14 +4273,57 @@
       </p:sp>
       <p:sp>
         <p:nvSpPr>
-          <p:cNvPr id="3" name="TextBox 2"/>
+          <p:cNvPr id="3" name="Rectangle 2"/>
+          <p:cNvSpPr/>
+          <p:nvPr/>
+        </p:nvSpPr>
+        <p:spPr>
+          <a:xfrm>
+            <a:off x="0" y="0"/>
+            <a:ext cx="12191695" cy="73152"/>
+          </a:xfrm>
+          <a:prstGeom prst="rect">
+            <a:avLst/>
+          </a:prstGeom>
+          <a:solidFill>
+            <a:srgbClr val="F59E0B"/>
+          </a:solidFill>
+          <a:ln>
+            <a:noFill/>
+          </a:ln>
+        </p:spPr>
+        <p:style>
+          <a:lnRef idx="1">
+            <a:schemeClr val="accent1"/>
+          </a:lnRef>
+          <a:fillRef idx="3">
+            <a:schemeClr val="accent1"/>
+          </a:fillRef>
+          <a:effectRef idx="2">
+            <a:schemeClr val="accent1"/>
+          </a:effectRef>
+          <a:fontRef idx="minor">
+            <a:schemeClr val="lt1"/>
+          </a:fontRef>
+        </p:style>
+        <p:txBody>
+          <a:bodyPr rtlCol="0" anchor="ctr"/>
+          <a:lstStyle/>
+          <a:p>
+            <a:pPr algn="ctr"/>
+          </a:p>
+        </p:txBody>
+      </p:sp>
+      <p:sp>
+        <p:nvSpPr>
+          <p:cNvPr id="4" name="TextBox 3"/>
           <p:cNvSpPr txBox="1"/>
           <p:nvPr/>
         </p:nvSpPr>
         <p:spPr>
           <a:xfrm>
             <a:off x="731520" y="365760"/>
-            <a:ext cx="10515600" cy="320040"/>
+            <a:ext cx="10698480" cy="274320"/>
           </a:xfrm>
           <a:prstGeom prst="rect">
             <a:avLst/>
@@ -4109,34 +4331,35 @@
           <a:noFill/>
         </p:spPr>
         <p:txBody>
-          <a:bodyPr wrap="none">
+          <a:bodyPr wrap="square">
             <a:spAutoFit/>
           </a:bodyPr>
           <a:lstStyle/>
           <a:p>
             <a:pPr>
-              <a:defRPr sz="1100" b="1">
+              <a:defRPr sz="1000" b="1">
                 <a:solidFill>
                   <a:srgbClr val="38BDF8"/>
                 </a:solidFill>
-              </a:defRPr>
-            </a:pPr>
-            <a:r>
-              <a:t>BIZORA AI — PITCH DECK</a:t>
-            </a:r>
-          </a:p>
-        </p:txBody>
-      </p:sp>
-      <p:sp>
-        <p:nvSpPr>
-          <p:cNvPr id="4" name="TextBox 3"/>
+                <a:latin typeface="Segoe UI"/>
+              </a:defRPr>
+            </a:pPr>
+            <a:r>
+              <a:t>PRODUCT ARCHITECTURE</a:t>
+            </a:r>
+          </a:p>
+        </p:txBody>
+      </p:sp>
+      <p:sp>
+        <p:nvSpPr>
+          <p:cNvPr id="5" name="TextBox 4"/>
           <p:cNvSpPr txBox="1"/>
           <p:nvPr/>
         </p:nvSpPr>
         <p:spPr>
           <a:xfrm>
-            <a:off x="731520" y="640080"/>
-            <a:ext cx="10515600" cy="731520"/>
+            <a:off x="731520" y="621792"/>
+            <a:ext cx="10698480" cy="640080"/>
           </a:xfrm>
           <a:prstGeom prst="rect">
             <a:avLst/>
@@ -4144,40 +4367,41 @@
           <a:noFill/>
         </p:spPr>
         <p:txBody>
-          <a:bodyPr wrap="none">
+          <a:bodyPr wrap="square">
             <a:spAutoFit/>
           </a:bodyPr>
           <a:lstStyle/>
           <a:p>
             <a:pPr>
-              <a:defRPr sz="2800" b="1">
+              <a:defRPr sz="2600" b="1">
                 <a:solidFill>
                   <a:srgbClr val="F8FAFC"/>
                 </a:solidFill>
-              </a:defRPr>
-            </a:pPr>
-            <a:r>
-              <a:t>Unified Ecosystem: 5 Synchronized Portals</a:t>
-            </a:r>
-          </a:p>
-        </p:txBody>
-      </p:sp>
-      <p:sp>
-        <p:nvSpPr>
-          <p:cNvPr id="5" name="Rounded Rectangle 4"/>
+                <a:latin typeface="Trebuchet MS"/>
+              </a:defRPr>
+            </a:pPr>
+            <a:r>
+              <a:t>One Unified Core: 5 Synchronized Portals</a:t>
+            </a:r>
+          </a:p>
+        </p:txBody>
+      </p:sp>
+      <p:sp>
+        <p:nvSpPr>
+          <p:cNvPr id="6" name="Rounded Rectangle 5"/>
           <p:cNvSpPr/>
           <p:nvPr/>
         </p:nvSpPr>
         <p:spPr>
           <a:xfrm>
             <a:off x="731520" y="1645920"/>
-            <a:ext cx="10698480" cy="777240"/>
+            <a:ext cx="10698480" cy="804672"/>
           </a:xfrm>
           <a:prstGeom prst="roundRect">
             <a:avLst/>
           </a:prstGeom>
           <a:solidFill>
-            <a:srgbClr val="0F172A"/>
+            <a:srgbClr val="101828"/>
           </a:solidFill>
           <a:ln>
             <a:solidFill>
@@ -4200,7 +4424,7 @@
           </a:fontRef>
         </p:style>
         <p:txBody>
-          <a:bodyPr rtlCol="0" anchor="ctr"/>
+          <a:bodyPr rtlCol="0" anchor="ctr" wrap="square"/>
           <a:lstStyle/>
           <a:p>
             <a:pPr algn="ctr">
@@ -4208,10 +4432,11 @@
                 <a:solidFill>
                   <a:srgbClr val="F59E0B"/>
                 </a:solidFill>
-              </a:defRPr>
-            </a:pPr>
-            <a:r>
-              <a:t>👑 Owner Portal  |  bizora-owner.onrender.com</a:t>
+                <a:latin typeface="Trebuchet MS"/>
+              </a:defRPr>
+            </a:pPr>
+            <a:r>
+              <a:t>👑 Store Owner Portal   —   bizora-owner.onrender.com</a:t>
             </a:r>
           </a:p>
           <a:p>
@@ -4220,30 +4445,31 @@
                 <a:solidFill>
                   <a:srgbClr val="94A3B8"/>
                 </a:solidFill>
-              </a:defRPr>
-            </a:pPr>
-            <a:r>
-              <a:t>12-Core POS, Inventory, P&amp;L, Double-Entry ledger, Daily sales, and Anomaly radar.</a:t>
-            </a:r>
-          </a:p>
-        </p:txBody>
-      </p:sp>
-      <p:sp>
-        <p:nvSpPr>
-          <p:cNvPr id="6" name="Rounded Rectangle 5"/>
+                <a:latin typeface="Segoe UI"/>
+              </a:defRPr>
+            </a:pPr>
+            <a:r>
+              <a:t>12-Core Shopkeeper Dashboard: POS billing, camera barcode scan, inventory FIFO, daily P&amp;L accounting, and anomaly radar.</a:t>
+            </a:r>
+          </a:p>
+        </p:txBody>
+      </p:sp>
+      <p:sp>
+        <p:nvSpPr>
+          <p:cNvPr id="7" name="Rounded Rectangle 6"/>
           <p:cNvSpPr/>
           <p:nvPr/>
         </p:nvSpPr>
         <p:spPr>
           <a:xfrm>
             <a:off x="731520" y="2560320"/>
-            <a:ext cx="10698480" cy="777240"/>
+            <a:ext cx="10698480" cy="804672"/>
           </a:xfrm>
           <a:prstGeom prst="roundRect">
             <a:avLst/>
           </a:prstGeom>
           <a:solidFill>
-            <a:srgbClr val="0F172A"/>
+            <a:srgbClr val="101828"/>
           </a:solidFill>
           <a:ln>
             <a:solidFill>
@@ -4266,7 +4492,7 @@
           </a:fontRef>
         </p:style>
         <p:txBody>
-          <a:bodyPr rtlCol="0" anchor="ctr"/>
+          <a:bodyPr rtlCol="0" anchor="ctr" wrap="square"/>
           <a:lstStyle/>
           <a:p>
             <a:pPr algn="ctr">
@@ -4274,10 +4500,11 @@
                 <a:solidFill>
                   <a:srgbClr val="F59E0B"/>
                 </a:solidFill>
-              </a:defRPr>
-            </a:pPr>
-            <a:r>
-              <a:t>🛍️ Customer Storefront  |  bizora-customer.onrender.com</a:t>
+                <a:latin typeface="Trebuchet MS"/>
+              </a:defRPr>
+            </a:pPr>
+            <a:r>
+              <a:t>🛍️ Customer Storefront   —   bizora-customer.onrender.com</a:t>
             </a:r>
           </a:p>
           <a:p>
@@ -4286,30 +4513,31 @@
                 <a:solidFill>
                   <a:srgbClr val="94A3B8"/>
                 </a:solidFill>
-              </a:defRPr>
-            </a:pPr>
-            <a:r>
-              <a:t>Hyperlocal store catalog, 10-min essentials ordering, digital bills, loyalty wallet.</a:t>
-            </a:r>
-          </a:p>
-        </p:txBody>
-      </p:sp>
-      <p:sp>
-        <p:nvSpPr>
-          <p:cNvPr id="7" name="Rounded Rectangle 6"/>
+                <a:latin typeface="Segoe UI"/>
+              </a:defRPr>
+            </a:pPr>
+            <a:r>
+              <a:t>Hyperlocal neighborhood shopping catalog, 10-min essentials ordering, digital bill wallet, and loyalty points.</a:t>
+            </a:r>
+          </a:p>
+        </p:txBody>
+      </p:sp>
+      <p:sp>
+        <p:nvSpPr>
+          <p:cNvPr id="8" name="Rounded Rectangle 7"/>
           <p:cNvSpPr/>
           <p:nvPr/>
         </p:nvSpPr>
         <p:spPr>
           <a:xfrm>
             <a:off x="731520" y="3474720"/>
-            <a:ext cx="10698480" cy="777240"/>
+            <a:ext cx="10698480" cy="804672"/>
           </a:xfrm>
           <a:prstGeom prst="roundRect">
             <a:avLst/>
           </a:prstGeom>
           <a:solidFill>
-            <a:srgbClr val="0F172A"/>
+            <a:srgbClr val="101828"/>
           </a:solidFill>
           <a:ln>
             <a:solidFill>
@@ -4332,7 +4560,7 @@
           </a:fontRef>
         </p:style>
         <p:txBody>
-          <a:bodyPr rtlCol="0" anchor="ctr"/>
+          <a:bodyPr rtlCol="0" anchor="ctr" wrap="square"/>
           <a:lstStyle/>
           <a:p>
             <a:pPr algn="ctr">
@@ -4340,10 +4568,11 @@
                 <a:solidFill>
                   <a:srgbClr val="F59E0B"/>
                 </a:solidFill>
-              </a:defRPr>
-            </a:pPr>
-            <a:r>
-              <a:t>🚚 Supplier Hub  |  bizora-supplier.onrender.com</a:t>
+                <a:latin typeface="Trebuchet MS"/>
+              </a:defRPr>
+            </a:pPr>
+            <a:r>
+              <a:t>🚚 Supplier Hub   —   bizora-supplier.onrender.com</a:t>
             </a:r>
           </a:p>
           <a:p>
@@ -4352,30 +4581,31 @@
                 <a:solidFill>
                   <a:srgbClr val="94A3B8"/>
                 </a:solidFill>
-              </a:defRPr>
-            </a:pPr>
-            <a:r>
-              <a:t>Digital Purchase Order approvals, shipment dispatch tracking, and invoice reconciliation.</a:t>
-            </a:r>
-          </a:p>
-        </p:txBody>
-      </p:sp>
-      <p:sp>
-        <p:nvSpPr>
-          <p:cNvPr id="8" name="Rounded Rectangle 7"/>
+                <a:latin typeface="Segoe UI"/>
+              </a:defRPr>
+            </a:pPr>
+            <a:r>
+              <a:t>Direct vendor portal for reviewing inbound digital Purchase Orders, shipment tracking, and invoice matching.</a:t>
+            </a:r>
+          </a:p>
+        </p:txBody>
+      </p:sp>
+      <p:sp>
+        <p:nvSpPr>
+          <p:cNvPr id="9" name="Rounded Rectangle 8"/>
           <p:cNvSpPr/>
           <p:nvPr/>
         </p:nvSpPr>
         <p:spPr>
           <a:xfrm>
             <a:off x="731520" y="4389120"/>
-            <a:ext cx="10698480" cy="777240"/>
+            <a:ext cx="10698480" cy="804672"/>
           </a:xfrm>
           <a:prstGeom prst="roundRect">
             <a:avLst/>
           </a:prstGeom>
           <a:solidFill>
-            <a:srgbClr val="0F172A"/>
+            <a:srgbClr val="101828"/>
           </a:solidFill>
           <a:ln>
             <a:solidFill>
@@ -4398,7 +4628,7 @@
           </a:fontRef>
         </p:style>
         <p:txBody>
-          <a:bodyPr rtlCol="0" anchor="ctr"/>
+          <a:bodyPr rtlCol="0" anchor="ctr" wrap="square"/>
           <a:lstStyle/>
           <a:p>
             <a:pPr algn="ctr">
@@ -4406,10 +4636,11 @@
                 <a:solidFill>
                   <a:srgbClr val="F59E0B"/>
                 </a:solidFill>
-              </a:defRPr>
-            </a:pPr>
-            <a:r>
-              <a:t>🛡️ Super Admin Console  |  bizora-admin.onrender.com</a:t>
+                <a:latin typeface="Trebuchet MS"/>
+              </a:defRPr>
+            </a:pPr>
+            <a:r>
+              <a:t>🛡️ Super Admin Console   —   bizora-admin.onrender.com</a:t>
             </a:r>
           </a:p>
           <a:p>
@@ -4418,30 +4649,31 @@
                 <a:solidFill>
                   <a:srgbClr val="94A3B8"/>
                 </a:solidFill>
-              </a:defRPr>
-            </a:pPr>
-            <a:r>
-              <a:t>Shopkeeper verification, tenant database provisioning, and 5-min server health watchdog.</a:t>
-            </a:r>
-          </a:p>
-        </p:txBody>
-      </p:sp>
-      <p:sp>
-        <p:nvSpPr>
-          <p:cNvPr id="9" name="Rounded Rectangle 8"/>
+                <a:latin typeface="Segoe UI"/>
+              </a:defRPr>
+            </a:pPr>
+            <a:r>
+              <a:t>Platform verification console for reviewing store registrations, tenant provisioning, and 5-min server health watchdog.</a:t>
+            </a:r>
+          </a:p>
+        </p:txBody>
+      </p:sp>
+      <p:sp>
+        <p:nvSpPr>
+          <p:cNvPr id="10" name="Rounded Rectangle 9"/>
           <p:cNvSpPr/>
           <p:nvPr/>
         </p:nvSpPr>
         <p:spPr>
           <a:xfrm>
             <a:off x="731520" y="5303520"/>
-            <a:ext cx="10698480" cy="777240"/>
+            <a:ext cx="10698480" cy="804672"/>
           </a:xfrm>
           <a:prstGeom prst="roundRect">
             <a:avLst/>
           </a:prstGeom>
           <a:solidFill>
-            <a:srgbClr val="0F172A"/>
+            <a:srgbClr val="101828"/>
           </a:solidFill>
           <a:ln>
             <a:solidFill>
@@ -4464,7 +4696,7 @@
           </a:fontRef>
         </p:style>
         <p:txBody>
-          <a:bodyPr rtlCol="0" anchor="ctr"/>
+          <a:bodyPr rtlCol="0" anchor="ctr" wrap="square"/>
           <a:lstStyle/>
           <a:p>
             <a:pPr algn="ctr">
@@ -4472,10 +4704,11 @@
                 <a:solidFill>
                   <a:srgbClr val="F59E0B"/>
                 </a:solidFill>
-              </a:defRPr>
-            </a:pPr>
-            <a:r>
-              <a:t>🌐 Web Marketing Portal  |  bizora-web.onrender.com</a:t>
+                <a:latin typeface="Trebuchet MS"/>
+              </a:defRPr>
+            </a:pPr>
+            <a:r>
+              <a:t>🌐 Web Marketing Portal   —   bizora-web.onrender.com</a:t>
             </a:r>
           </a:p>
           <a:p>
@@ -4484,10 +4717,11 @@
                 <a:solidFill>
                   <a:srgbClr val="94A3B8"/>
                 </a:solidFill>
-              </a:defRPr>
-            </a:pPr>
-            <a:r>
-              <a:t>Platform showcase, interactive ROI calculator, and transparent SaaS subscription checkout.</a:t>
+                <a:latin typeface="Segoe UI"/>
+              </a:defRPr>
+            </a:pPr>
+            <a:r>
+              <a:t>Public showcase, interactive merchant ROI calculator, transparent SaaS pricing, and instant self-onboarding.</a:t>
             </a:r>
           </a:p>
         </p:txBody>
@@ -4525,7 +4759,7 @@
             <a:avLst/>
           </a:prstGeom>
           <a:solidFill>
-            <a:srgbClr val="090D16"/>
+            <a:srgbClr val="0A0E17"/>
           </a:solidFill>
           <a:ln>
             <a:noFill/>
@@ -4555,95 +4789,23 @@
       </p:sp>
       <p:sp>
         <p:nvSpPr>
-          <p:cNvPr id="3" name="TextBox 2"/>
-          <p:cNvSpPr txBox="1"/>
+          <p:cNvPr id="3" name="Rectangle 2"/>
+          <p:cNvSpPr/>
           <p:nvPr/>
         </p:nvSpPr>
         <p:spPr>
           <a:xfrm>
-            <a:off x="731520" y="365760"/>
-            <a:ext cx="10515600" cy="320040"/>
+            <a:off x="0" y="0"/>
+            <a:ext cx="12191695" cy="73152"/>
           </a:xfrm>
           <a:prstGeom prst="rect">
             <a:avLst/>
           </a:prstGeom>
-          <a:noFill/>
-        </p:spPr>
-        <p:txBody>
-          <a:bodyPr wrap="none">
-            <a:spAutoFit/>
-          </a:bodyPr>
-          <a:lstStyle/>
-          <a:p>
-            <a:pPr>
-              <a:defRPr sz="1100" b="1">
-                <a:solidFill>
-                  <a:srgbClr val="38BDF8"/>
-                </a:solidFill>
-              </a:defRPr>
-            </a:pPr>
-            <a:r>
-              <a:t>BIZORA AI — PITCH DECK</a:t>
-            </a:r>
-          </a:p>
-        </p:txBody>
-      </p:sp>
-      <p:sp>
-        <p:nvSpPr>
-          <p:cNvPr id="4" name="TextBox 3"/>
-          <p:cNvSpPr txBox="1"/>
-          <p:nvPr/>
-        </p:nvSpPr>
-        <p:spPr>
-          <a:xfrm>
-            <a:off x="731520" y="640080"/>
-            <a:ext cx="10515600" cy="731520"/>
-          </a:xfrm>
-          <a:prstGeom prst="rect">
-            <a:avLst/>
-          </a:prstGeom>
-          <a:noFill/>
-        </p:spPr>
-        <p:txBody>
-          <a:bodyPr wrap="none">
-            <a:spAutoFit/>
-          </a:bodyPr>
-          <a:lstStyle/>
-          <a:p>
-            <a:pPr>
-              <a:defRPr sz="2800" b="1">
-                <a:solidFill>
-                  <a:srgbClr val="F8FAFC"/>
-                </a:solidFill>
-              </a:defRPr>
-            </a:pPr>
-            <a:r>
-              <a:t>Market Opportunity: India's $1.1 Trillion Retail Landscape</a:t>
-            </a:r>
-          </a:p>
-        </p:txBody>
-      </p:sp>
-      <p:sp>
-        <p:nvSpPr>
-          <p:cNvPr id="5" name="Rounded Rectangle 4"/>
-          <p:cNvSpPr/>
-          <p:nvPr/>
-        </p:nvSpPr>
-        <p:spPr>
-          <a:xfrm>
-            <a:off x="731520" y="2011680"/>
-            <a:ext cx="2560320" cy="3657600"/>
-          </a:xfrm>
-          <a:prstGeom prst="roundRect">
-            <a:avLst/>
-          </a:prstGeom>
           <a:solidFill>
-            <a:srgbClr val="0F172A"/>
+            <a:srgbClr val="F59E0B"/>
           </a:solidFill>
           <a:ln>
-            <a:solidFill>
-              <a:srgbClr val="F59E0B"/>
-            </a:solidFill>
+            <a:noFill/>
           </a:ln>
         </p:spPr>
         <p:style>
@@ -4664,45 +4826,78 @@
           <a:bodyPr rtlCol="0" anchor="ctr"/>
           <a:lstStyle/>
           <a:p>
-            <a:pPr algn="ctr">
+            <a:pPr algn="ctr"/>
+          </a:p>
+        </p:txBody>
+      </p:sp>
+      <p:sp>
+        <p:nvSpPr>
+          <p:cNvPr id="4" name="TextBox 3"/>
+          <p:cNvSpPr txBox="1"/>
+          <p:nvPr/>
+        </p:nvSpPr>
+        <p:spPr>
+          <a:xfrm>
+            <a:off x="731520" y="365760"/>
+            <a:ext cx="10698480" cy="274320"/>
+          </a:xfrm>
+          <a:prstGeom prst="rect">
+            <a:avLst/>
+          </a:prstGeom>
+          <a:noFill/>
+        </p:spPr>
+        <p:txBody>
+          <a:bodyPr wrap="square">
+            <a:spAutoFit/>
+          </a:bodyPr>
+          <a:lstStyle/>
+          <a:p>
+            <a:pPr>
+              <a:defRPr sz="1000" b="1">
+                <a:solidFill>
+                  <a:srgbClr val="38BDF8"/>
+                </a:solidFill>
+                <a:latin typeface="Segoe UI"/>
+              </a:defRPr>
+            </a:pPr>
+            <a:r>
+              <a:t>MARKET SIZE &amp; TAM</a:t>
+            </a:r>
+          </a:p>
+        </p:txBody>
+      </p:sp>
+      <p:sp>
+        <p:nvSpPr>
+          <p:cNvPr id="5" name="TextBox 4"/>
+          <p:cNvSpPr txBox="1"/>
+          <p:nvPr/>
+        </p:nvSpPr>
+        <p:spPr>
+          <a:xfrm>
+            <a:off x="731520" y="621792"/>
+            <a:ext cx="10698480" cy="640080"/>
+          </a:xfrm>
+          <a:prstGeom prst="rect">
+            <a:avLst/>
+          </a:prstGeom>
+          <a:noFill/>
+        </p:spPr>
+        <p:txBody>
+          <a:bodyPr wrap="square">
+            <a:spAutoFit/>
+          </a:bodyPr>
+          <a:lstStyle/>
+          <a:p>
+            <a:pPr>
               <a:defRPr sz="2600" b="1">
                 <a:solidFill>
-                  <a:srgbClr val="F59E0B"/>
-                </a:solidFill>
-              </a:defRPr>
-            </a:pPr>
-            <a:r>
-              <a:t>13 Million+</a:t>
-            </a:r>
-          </a:p>
-          <a:p>
-            <a:pPr>
-              <a:spcBef>
-                <a:spcPts val="1200"/>
-              </a:spcBef>
-              <a:defRPr sz="1400" b="1">
-                <a:solidFill>
                   <a:srgbClr val="F8FAFC"/>
                 </a:solidFill>
-              </a:defRPr>
-            </a:pPr>
-            <a:r>
-              <a:t>Kirana Stores in India</a:t>
-            </a:r>
-          </a:p>
-          <a:p>
-            <a:pPr>
-              <a:spcBef>
-                <a:spcPts val="1000"/>
-              </a:spcBef>
-              <a:defRPr sz="1100">
-                <a:solidFill>
-                  <a:srgbClr val="94A3B8"/>
-                </a:solidFill>
-              </a:defRPr>
-            </a:pPr>
-            <a:r>
-              <a:t>90% of India's retail commerce flows through unorganized neighborhood stores.</a:t>
+                <a:latin typeface="Trebuchet MS"/>
+              </a:defRPr>
+            </a:pPr>
+            <a:r>
+              <a:t>Market Opportunity: India's $1.1 Trillion Retail Landscape</a:t>
             </a:r>
           </a:p>
         </p:txBody>
@@ -4715,18 +4910,18 @@
         </p:nvSpPr>
         <p:spPr>
           <a:xfrm>
-            <a:off x="3429000" y="2011680"/>
-            <a:ext cx="2560320" cy="3657600"/>
+            <a:off x="731520" y="1737360"/>
+            <a:ext cx="2560320" cy="4297680"/>
           </a:xfrm>
           <a:prstGeom prst="roundRect">
             <a:avLst/>
           </a:prstGeom>
           <a:solidFill>
-            <a:srgbClr val="0F172A"/>
+            <a:srgbClr val="101828"/>
           </a:solidFill>
-          <a:ln>
+          <a:ln w="25400">
             <a:solidFill>
-              <a:srgbClr val="38BDF8"/>
+              <a:srgbClr val="F59E0B"/>
             </a:solidFill>
           </a:ln>
         </p:spPr>
@@ -4745,33 +4940,19 @@
           </a:fontRef>
         </p:style>
         <p:txBody>
-          <a:bodyPr rtlCol="0" anchor="ctr"/>
+          <a:bodyPr rtlCol="0" anchor="ctr" wrap="square"/>
           <a:lstStyle/>
           <a:p>
             <a:pPr algn="ctr">
-              <a:defRPr sz="2600" b="1">
-                <a:solidFill>
-                  <a:srgbClr val="38BDF8"/>
-                </a:solidFill>
-              </a:defRPr>
-            </a:pPr>
-            <a:r>
-              <a:t>$1.1 Trillion</a:t>
-            </a:r>
-          </a:p>
-          <a:p>
-            <a:pPr>
-              <a:spcBef>
-                <a:spcPts val="1200"/>
-              </a:spcBef>
-              <a:defRPr sz="1400" b="1">
-                <a:solidFill>
-                  <a:srgbClr val="F8FAFC"/>
-                </a:solidFill>
-              </a:defRPr>
-            </a:pPr>
-            <a:r>
-              <a:t>Total Retail Market</a:t>
+              <a:defRPr sz="1100" b="1">
+                <a:solidFill>
+                  <a:srgbClr val="F59E0B"/>
+                </a:solidFill>
+                <a:latin typeface="Segoe UI"/>
+              </a:defRPr>
+            </a:pPr>
+            <a:r>
+              <a:t>TAM: TOTAL MARKET</a:t>
             </a:r>
           </a:p>
           <a:p>
@@ -4779,14 +4960,31 @@
               <a:spcBef>
                 <a:spcPts val="1000"/>
               </a:spcBef>
-              <a:defRPr sz="1100">
+              <a:defRPr sz="2800" b="1">
+                <a:solidFill>
+                  <a:srgbClr val="F8FAFC"/>
+                </a:solidFill>
+                <a:latin typeface="Trebuchet MS"/>
+              </a:defRPr>
+            </a:pPr>
+            <a:r>
+              <a:t>$1.1 Trillion</a:t>
+            </a:r>
+          </a:p>
+          <a:p>
+            <a:pPr>
+              <a:spcBef>
+                <a:spcPts val="1400"/>
+              </a:spcBef>
+              <a:defRPr sz="1200">
                 <a:solidFill>
                   <a:srgbClr val="94A3B8"/>
                 </a:solidFill>
-              </a:defRPr>
-            </a:pPr>
-            <a:r>
-              <a:t>Projected to cross $2.0 Trillion by 2030, driven by digital adoption.</a:t>
+                <a:latin typeface="Segoe UI"/>
+              </a:defRPr>
+            </a:pPr>
+            <a:r>
+              <a:t>Total Indian retail commerce, expanding at 12% CAGR to cross $2.0 Trillion by 2030.</a:t>
             </a:r>
           </a:p>
         </p:txBody>
@@ -4799,16 +4997,16 @@
         </p:nvSpPr>
         <p:spPr>
           <a:xfrm>
-            <a:off x="6126480" y="2011680"/>
-            <a:ext cx="2560320" cy="3657600"/>
+            <a:off x="3429000" y="1737360"/>
+            <a:ext cx="2560320" cy="4297680"/>
           </a:xfrm>
           <a:prstGeom prst="roundRect">
             <a:avLst/>
           </a:prstGeom>
           <a:solidFill>
-            <a:srgbClr val="0F172A"/>
+            <a:srgbClr val="101828"/>
           </a:solidFill>
-          <a:ln>
+          <a:ln w="25400">
             <a:solidFill>
               <a:srgbClr val="38BDF8"/>
             </a:solidFill>
@@ -4829,33 +5027,19 @@
           </a:fontRef>
         </p:style>
         <p:txBody>
-          <a:bodyPr rtlCol="0" anchor="ctr"/>
+          <a:bodyPr rtlCol="0" anchor="ctr" wrap="square"/>
           <a:lstStyle/>
           <a:p>
             <a:pPr algn="ctr">
-              <a:defRPr sz="2600" b="1">
+              <a:defRPr sz="1100" b="1">
                 <a:solidFill>
                   <a:srgbClr val="38BDF8"/>
                 </a:solidFill>
-              </a:defRPr>
-            </a:pPr>
-            <a:r>
-              <a:t>$4.8 Billion</a:t>
-            </a:r>
-          </a:p>
-          <a:p>
-            <a:pPr>
-              <a:spcBef>
-                <a:spcPts val="1200"/>
-              </a:spcBef>
-              <a:defRPr sz="1400" b="1">
-                <a:solidFill>
-                  <a:srgbClr val="F8FAFC"/>
-                </a:solidFill>
-              </a:defRPr>
-            </a:pPr>
-            <a:r>
-              <a:t>Serviceable Market (SAM)</a:t>
+                <a:latin typeface="Segoe UI"/>
+              </a:defRPr>
+            </a:pPr>
+            <a:r>
+              <a:t>SAM: TARGET STORES</a:t>
             </a:r>
           </a:p>
           <a:p>
@@ -4863,14 +5047,31 @@
               <a:spcBef>
                 <a:spcPts val="1000"/>
               </a:spcBef>
-              <a:defRPr sz="1100">
+              <a:defRPr sz="2800" b="1">
+                <a:solidFill>
+                  <a:srgbClr val="F8FAFC"/>
+                </a:solidFill>
+                <a:latin typeface="Trebuchet MS"/>
+              </a:defRPr>
+            </a:pPr>
+            <a:r>
+              <a:t>13 Million+</a:t>
+            </a:r>
+          </a:p>
+          <a:p>
+            <a:pPr>
+              <a:spcBef>
+                <a:spcPts val="1400"/>
+              </a:spcBef>
+              <a:defRPr sz="1200">
                 <a:solidFill>
                   <a:srgbClr val="94A3B8"/>
                 </a:solidFill>
-              </a:defRPr>
-            </a:pPr>
-            <a:r>
-              <a:t>Retail SaaS and inventory spend for modernizing urban and semi-urban stores.</a:t>
+                <a:latin typeface="Segoe UI"/>
+              </a:defRPr>
+            </a:pPr>
+            <a:r>
+              <a:t>Total Kirana stores across Tier 1, 2, and 3 Indian cities powering 90% of food &amp; grocery commerce.</a:t>
             </a:r>
           </a:p>
         </p:txBody>
@@ -4883,18 +5084,18 @@
         </p:nvSpPr>
         <p:spPr>
           <a:xfrm>
-            <a:off x="8823960" y="2011680"/>
-            <a:ext cx="2560320" cy="3657600"/>
+            <a:off x="6126480" y="1737360"/>
+            <a:ext cx="2560320" cy="4297680"/>
           </a:xfrm>
           <a:prstGeom prst="roundRect">
             <a:avLst/>
           </a:prstGeom>
           <a:solidFill>
-            <a:srgbClr val="0F172A"/>
+            <a:srgbClr val="101828"/>
           </a:solidFill>
-          <a:ln>
+          <a:ln w="25400">
             <a:solidFill>
-              <a:srgbClr val="38BDF8"/>
+              <a:srgbClr val="10B981"/>
             </a:solidFill>
           </a:ln>
         </p:spPr>
@@ -4913,33 +5114,19 @@
           </a:fontRef>
         </p:style>
         <p:txBody>
-          <a:bodyPr rtlCol="0" anchor="ctr"/>
+          <a:bodyPr rtlCol="0" anchor="ctr" wrap="square"/>
           <a:lstStyle/>
           <a:p>
             <a:pPr algn="ctr">
-              <a:defRPr sz="2600" b="1">
-                <a:solidFill>
-                  <a:srgbClr val="38BDF8"/>
-                </a:solidFill>
-              </a:defRPr>
-            </a:pPr>
-            <a:r>
-              <a:t>₹35,000 / mo</a:t>
-            </a:r>
-          </a:p>
-          <a:p>
-            <a:pPr>
-              <a:spcBef>
-                <a:spcPts val="1200"/>
-              </a:spcBef>
-              <a:defRPr sz="1400" b="1">
-                <a:solidFill>
-                  <a:srgbClr val="F8FAFC"/>
-                </a:solidFill>
-              </a:defRPr>
-            </a:pPr>
-            <a:r>
-              <a:t>Net Value per Store</a:t>
+              <a:defRPr sz="1100" b="1">
+                <a:solidFill>
+                  <a:srgbClr val="10B981"/>
+                </a:solidFill>
+                <a:latin typeface="Segoe UI"/>
+              </a:defRPr>
+            </a:pPr>
+            <a:r>
+              <a:t>SOM: ADDRESSABLE SAAS</a:t>
             </a:r>
           </a:p>
           <a:p>
@@ -4947,14 +5134,118 @@
               <a:spcBef>
                 <a:spcPts val="1000"/>
               </a:spcBef>
-              <a:defRPr sz="1100">
+              <a:defRPr sz="2800" b="1">
+                <a:solidFill>
+                  <a:srgbClr val="F8FAFC"/>
+                </a:solidFill>
+                <a:latin typeface="Trebuchet MS"/>
+              </a:defRPr>
+            </a:pPr>
+            <a:r>
+              <a:t>$4.8 Billion</a:t>
+            </a:r>
+          </a:p>
+          <a:p>
+            <a:pPr>
+              <a:spcBef>
+                <a:spcPts val="1400"/>
+              </a:spcBef>
+              <a:defRPr sz="1200">
                 <a:solidFill>
                   <a:srgbClr val="94A3B8"/>
                 </a:solidFill>
-              </a:defRPr>
-            </a:pPr>
-            <a:r>
-              <a:t>Shrinkage prevention, paperless billing, and checkout speed optimization.</a:t>
+                <a:latin typeface="Segoe UI"/>
+              </a:defRPr>
+            </a:pPr>
+            <a:r>
+              <a:t>Serviceable SaaS and value-added fintech revenue from tech-adopting urban &amp; semi-urban retailers.</a:t>
+            </a:r>
+          </a:p>
+        </p:txBody>
+      </p:sp>
+      <p:sp>
+        <p:nvSpPr>
+          <p:cNvPr id="9" name="Rounded Rectangle 8"/>
+          <p:cNvSpPr/>
+          <p:nvPr/>
+        </p:nvSpPr>
+        <p:spPr>
+          <a:xfrm>
+            <a:off x="8823960" y="1737360"/>
+            <a:ext cx="2560320" cy="4297680"/>
+          </a:xfrm>
+          <a:prstGeom prst="roundRect">
+            <a:avLst/>
+          </a:prstGeom>
+          <a:solidFill>
+            <a:srgbClr val="101828"/>
+          </a:solidFill>
+          <a:ln w="25400">
+            <a:solidFill>
+              <a:srgbClr val="FDE68A"/>
+            </a:solidFill>
+          </a:ln>
+        </p:spPr>
+        <p:style>
+          <a:lnRef idx="1">
+            <a:schemeClr val="accent1"/>
+          </a:lnRef>
+          <a:fillRef idx="3">
+            <a:schemeClr val="accent1"/>
+          </a:fillRef>
+          <a:effectRef idx="2">
+            <a:schemeClr val="accent1"/>
+          </a:effectRef>
+          <a:fontRef idx="minor">
+            <a:schemeClr val="lt1"/>
+          </a:fontRef>
+        </p:style>
+        <p:txBody>
+          <a:bodyPr rtlCol="0" anchor="ctr" wrap="square"/>
+          <a:lstStyle/>
+          <a:p>
+            <a:pPr algn="ctr">
+              <a:defRPr sz="1100" b="1">
+                <a:solidFill>
+                  <a:srgbClr val="FDE68A"/>
+                </a:solidFill>
+                <a:latin typeface="Segoe UI"/>
+              </a:defRPr>
+            </a:pPr>
+            <a:r>
+              <a:t>MERCHANT VALUE</a:t>
+            </a:r>
+          </a:p>
+          <a:p>
+            <a:pPr>
+              <a:spcBef>
+                <a:spcPts val="1000"/>
+              </a:spcBef>
+              <a:defRPr sz="2800" b="1">
+                <a:solidFill>
+                  <a:srgbClr val="F8FAFC"/>
+                </a:solidFill>
+                <a:latin typeface="Trebuchet MS"/>
+              </a:defRPr>
+            </a:pPr>
+            <a:r>
+              <a:t>₹35,000 / mo</a:t>
+            </a:r>
+          </a:p>
+          <a:p>
+            <a:pPr>
+              <a:spcBef>
+                <a:spcPts val="1400"/>
+              </a:spcBef>
+              <a:defRPr sz="1200">
+                <a:solidFill>
+                  <a:srgbClr val="94A3B8"/>
+                </a:solidFill>
+                <a:latin typeface="Segoe UI"/>
+              </a:defRPr>
+            </a:pPr>
+            <a:r>
+              <a:t>Net monthly economic savings delivered per store via shrinkage prevention and faster checkout.</a:t>
             </a:r>
           </a:p>
         </p:txBody>
@@ -4992,7 +5283,7 @@
             <a:avLst/>
           </a:prstGeom>
           <a:solidFill>
-            <a:srgbClr val="090D16"/>
+            <a:srgbClr val="0A0E17"/>
           </a:solidFill>
           <a:ln>
             <a:noFill/>
@@ -5022,95 +5313,23 @@
       </p:sp>
       <p:sp>
         <p:nvSpPr>
-          <p:cNvPr id="3" name="TextBox 2"/>
-          <p:cNvSpPr txBox="1"/>
+          <p:cNvPr id="3" name="Rectangle 2"/>
+          <p:cNvSpPr/>
           <p:nvPr/>
         </p:nvSpPr>
         <p:spPr>
           <a:xfrm>
-            <a:off x="731520" y="365760"/>
-            <a:ext cx="10515600" cy="320040"/>
+            <a:off x="0" y="0"/>
+            <a:ext cx="12191695" cy="73152"/>
           </a:xfrm>
           <a:prstGeom prst="rect">
             <a:avLst/>
           </a:prstGeom>
-          <a:noFill/>
-        </p:spPr>
-        <p:txBody>
-          <a:bodyPr wrap="none">
-            <a:spAutoFit/>
-          </a:bodyPr>
-          <a:lstStyle/>
-          <a:p>
-            <a:pPr>
-              <a:defRPr sz="1100" b="1">
-                <a:solidFill>
-                  <a:srgbClr val="38BDF8"/>
-                </a:solidFill>
-              </a:defRPr>
-            </a:pPr>
-            <a:r>
-              <a:t>BIZORA AI — PITCH DECK</a:t>
-            </a:r>
-          </a:p>
-        </p:txBody>
-      </p:sp>
-      <p:sp>
-        <p:nvSpPr>
-          <p:cNvPr id="4" name="TextBox 3"/>
-          <p:cNvSpPr txBox="1"/>
-          <p:nvPr/>
-        </p:nvSpPr>
-        <p:spPr>
-          <a:xfrm>
-            <a:off x="731520" y="640080"/>
-            <a:ext cx="10515600" cy="731520"/>
-          </a:xfrm>
-          <a:prstGeom prst="rect">
-            <a:avLst/>
-          </a:prstGeom>
-          <a:noFill/>
-        </p:spPr>
-        <p:txBody>
-          <a:bodyPr wrap="none">
-            <a:spAutoFit/>
-          </a:bodyPr>
-          <a:lstStyle/>
-          <a:p>
-            <a:pPr>
-              <a:defRPr sz="2800" b="1">
-                <a:solidFill>
-                  <a:srgbClr val="F8FAFC"/>
-                </a:solidFill>
-              </a:defRPr>
-            </a:pPr>
-            <a:r>
-              <a:t>Business Model: High-Margin SaaS Subscription Tiers</a:t>
-            </a:r>
-          </a:p>
-        </p:txBody>
-      </p:sp>
-      <p:sp>
-        <p:nvSpPr>
-          <p:cNvPr id="5" name="Rounded Rectangle 4"/>
-          <p:cNvSpPr/>
-          <p:nvPr/>
-        </p:nvSpPr>
-        <p:spPr>
-          <a:xfrm>
-            <a:off x="731520" y="1645920"/>
-            <a:ext cx="3474720" cy="4389120"/>
-          </a:xfrm>
-          <a:prstGeom prst="roundRect">
-            <a:avLst/>
-          </a:prstGeom>
           <a:solidFill>
-            <a:srgbClr val="0F172A"/>
+            <a:srgbClr val="F59E0B"/>
           </a:solidFill>
           <a:ln>
-            <a:solidFill>
-              <a:srgbClr val="1E293B"/>
-            </a:solidFill>
+            <a:noFill/>
           </a:ln>
         </p:spPr>
         <p:style>
@@ -5131,397 +5350,698 @@
           <a:bodyPr rtlCol="0" anchor="ctr"/>
           <a:lstStyle/>
           <a:p>
-            <a:pPr algn="ctr">
-              <a:defRPr sz="1800" b="1">
-                <a:solidFill>
-                  <a:srgbClr val="F8FAFC"/>
-                </a:solidFill>
-              </a:defRPr>
-            </a:pPr>
-            <a:r>
-              <a:t>Starter / Kirana</a:t>
-            </a:r>
-          </a:p>
-          <a:p>
-            <a:pPr>
-              <a:spcBef>
-                <a:spcPts val="400"/>
-              </a:spcBef>
-              <a:defRPr sz="2200" b="1">
-                <a:solidFill>
-                  <a:srgbClr val="38BDF8"/>
-                </a:solidFill>
-              </a:defRPr>
-            </a:pPr>
-            <a:r>
-              <a:t>₹0 / Free Forever</a:t>
-            </a:r>
-          </a:p>
-          <a:p>
-            <a:pPr>
-              <a:spcBef>
-                <a:spcPts val="600"/>
-              </a:spcBef>
-              <a:defRPr sz="1100">
-                <a:solidFill>
-                  <a:srgbClr val="94A3B8"/>
-                </a:solidFill>
-              </a:defRPr>
-            </a:pPr>
-            <a:r>
-              <a:t>Single-counter kirana stores</a:t>
-            </a:r>
-          </a:p>
-          <a:p>
-            <a:pPr>
-              <a:spcBef>
-                <a:spcPts val="400"/>
-              </a:spcBef>
-              <a:defRPr sz="1100">
-                <a:solidFill>
-                  <a:srgbClr val="F8FAFC"/>
-                </a:solidFill>
-              </a:defRPr>
-            </a:pPr>
-            <a:r>
-              <a:t>• Camera Barcode POS</a:t>
-            </a:r>
-          </a:p>
-          <a:p>
-            <a:pPr>
-              <a:spcBef>
-                <a:spcPts val="400"/>
-              </a:spcBef>
-              <a:defRPr sz="1100">
-                <a:solidFill>
-                  <a:srgbClr val="F8FAFC"/>
-                </a:solidFill>
-              </a:defRPr>
-            </a:pPr>
-            <a:r>
-              <a:t>• Up to 200 Products</a:t>
-            </a:r>
-          </a:p>
-          <a:p>
-            <a:pPr>
-              <a:spcBef>
-                <a:spcPts val="400"/>
-              </a:spcBef>
-              <a:defRPr sz="1100">
-                <a:solidFill>
-                  <a:srgbClr val="F8FAFC"/>
-                </a:solidFill>
-              </a:defRPr>
-            </a:pPr>
-            <a:r>
-              <a:t>• Hindi &amp; English UI</a:t>
-            </a:r>
-          </a:p>
-          <a:p>
-            <a:pPr>
-              <a:spcBef>
-                <a:spcPts val="400"/>
-              </a:spcBef>
-              <a:defRPr sz="1100">
-                <a:solidFill>
-                  <a:srgbClr val="F8FAFC"/>
-                </a:solidFill>
-              </a:defRPr>
-            </a:pPr>
-            <a:r>
-              <a:t>• 1 Counter User</a:t>
-            </a:r>
-          </a:p>
-        </p:txBody>
-      </p:sp>
-      <p:sp>
-        <p:nvSpPr>
-          <p:cNvPr id="6" name="Rounded Rectangle 5"/>
-          <p:cNvSpPr/>
+            <a:pPr algn="ctr"/>
+          </a:p>
+        </p:txBody>
+      </p:sp>
+      <p:sp>
+        <p:nvSpPr>
+          <p:cNvPr id="4" name="TextBox 3"/>
+          <p:cNvSpPr txBox="1"/>
           <p:nvPr/>
         </p:nvSpPr>
         <p:spPr>
           <a:xfrm>
-            <a:off x="4343400" y="1645920"/>
-            <a:ext cx="3474720" cy="4389120"/>
-          </a:xfrm>
-          <a:prstGeom prst="roundRect">
+            <a:off x="731520" y="365760"/>
+            <a:ext cx="10698480" cy="274320"/>
+          </a:xfrm>
+          <a:prstGeom prst="rect">
             <a:avLst/>
           </a:prstGeom>
-          <a:solidFill>
-            <a:srgbClr val="0F172A"/>
-          </a:solidFill>
-          <a:ln>
-            <a:solidFill>
-              <a:srgbClr val="F59E0B"/>
-            </a:solidFill>
-          </a:ln>
-        </p:spPr>
-        <p:style>
-          <a:lnRef idx="1">
-            <a:schemeClr val="accent1"/>
-          </a:lnRef>
-          <a:fillRef idx="3">
-            <a:schemeClr val="accent1"/>
-          </a:fillRef>
-          <a:effectRef idx="2">
-            <a:schemeClr val="accent1"/>
-          </a:effectRef>
-          <a:fontRef idx="minor">
-            <a:schemeClr val="lt1"/>
-          </a:fontRef>
-        </p:style>
-        <p:txBody>
-          <a:bodyPr rtlCol="0" anchor="ctr"/>
-          <a:lstStyle/>
-          <a:p>
-            <a:pPr algn="ctr">
-              <a:defRPr sz="1800" b="1">
-                <a:solidFill>
-                  <a:srgbClr val="F59E0B"/>
-                </a:solidFill>
-              </a:defRPr>
-            </a:pPr>
-            <a:r>
-              <a:t>Retailer / Growth</a:t>
-            </a:r>
-          </a:p>
+          <a:noFill/>
+        </p:spPr>
+        <p:txBody>
+          <a:bodyPr wrap="square">
+            <a:spAutoFit/>
+          </a:bodyPr>
+          <a:lstStyle/>
           <a:p>
             <a:pPr>
-              <a:spcBef>
-                <a:spcPts val="400"/>
-              </a:spcBef>
-              <a:defRPr sz="2200" b="1">
+              <a:defRPr sz="1000" b="1">
                 <a:solidFill>
                   <a:srgbClr val="38BDF8"/>
                 </a:solidFill>
-              </a:defRPr>
-            </a:pPr>
-            <a:r>
-              <a:t>₹699 / month</a:t>
-            </a:r>
-          </a:p>
-          <a:p>
-            <a:pPr>
-              <a:spcBef>
-                <a:spcPts val="600"/>
-              </a:spcBef>
-              <a:defRPr sz="1100">
-                <a:solidFill>
-                  <a:srgbClr val="94A3B8"/>
-                </a:solidFill>
-              </a:defRPr>
-            </a:pPr>
-            <a:r>
-              <a:t>Supermarkets, apparel &amp; retail</a:t>
-            </a:r>
-          </a:p>
-          <a:p>
-            <a:pPr>
-              <a:spcBef>
-                <a:spcPts val="400"/>
-              </a:spcBef>
-              <a:defRPr sz="1100">
-                <a:solidFill>
-                  <a:srgbClr val="F8FAFC"/>
-                </a:solidFill>
-              </a:defRPr>
-            </a:pPr>
-            <a:r>
-              <a:t>• Unlimited Billing &amp; Products</a:t>
-            </a:r>
-          </a:p>
-          <a:p>
-            <a:pPr>
-              <a:spcBef>
-                <a:spcPts val="400"/>
-              </a:spcBef>
-              <a:defRPr sz="1100">
-                <a:solidFill>
-                  <a:srgbClr val="F8FAFC"/>
-                </a:solidFill>
-              </a:defRPr>
-            </a:pPr>
-            <a:r>
-              <a:t>• 500 WhatsApp Receipts/mo</a:t>
-            </a:r>
-          </a:p>
-          <a:p>
-            <a:pPr>
-              <a:spcBef>
-                <a:spcPts val="400"/>
-              </a:spcBef>
-              <a:defRPr sz="1100">
-                <a:solidFill>
-                  <a:srgbClr val="F8FAFC"/>
-                </a:solidFill>
-              </a:defRPr>
-            </a:pPr>
-            <a:r>
-              <a:t>• 10 Vapi Voice Calls/mo</a:t>
-            </a:r>
-          </a:p>
-          <a:p>
-            <a:pPr>
-              <a:spcBef>
-                <a:spcPts val="400"/>
-              </a:spcBef>
-              <a:defRPr sz="1100">
-                <a:solidFill>
-                  <a:srgbClr val="F8FAFC"/>
-                </a:solidFill>
-              </a:defRPr>
-            </a:pPr>
-            <a:r>
-              <a:t>• 3 Counter Accounts</a:t>
-            </a:r>
-          </a:p>
-        </p:txBody>
-      </p:sp>
-      <p:sp>
-        <p:nvSpPr>
-          <p:cNvPr id="7" name="Rounded Rectangle 6"/>
-          <p:cNvSpPr/>
+                <a:latin typeface="Segoe UI"/>
+              </a:defRPr>
+            </a:pPr>
+            <a:r>
+              <a:t>COMPETITIVE MOAT</a:t>
+            </a:r>
+          </a:p>
+        </p:txBody>
+      </p:sp>
+      <p:sp>
+        <p:nvSpPr>
+          <p:cNvPr id="5" name="TextBox 4"/>
+          <p:cNvSpPr txBox="1"/>
           <p:nvPr/>
         </p:nvSpPr>
         <p:spPr>
           <a:xfrm>
-            <a:off x="7955280" y="1645920"/>
-            <a:ext cx="3474720" cy="4389120"/>
-          </a:xfrm>
-          <a:prstGeom prst="roundRect">
+            <a:off x="731520" y="621792"/>
+            <a:ext cx="10698480" cy="640080"/>
+          </a:xfrm>
+          <a:prstGeom prst="rect">
             <a:avLst/>
           </a:prstGeom>
-          <a:solidFill>
-            <a:srgbClr val="0F172A"/>
-          </a:solidFill>
-          <a:ln>
-            <a:solidFill>
-              <a:srgbClr val="1E293B"/>
-            </a:solidFill>
-          </a:ln>
-        </p:spPr>
-        <p:style>
-          <a:lnRef idx="1">
-            <a:schemeClr val="accent1"/>
-          </a:lnRef>
-          <a:fillRef idx="3">
-            <a:schemeClr val="accent1"/>
-          </a:fillRef>
-          <a:effectRef idx="2">
-            <a:schemeClr val="accent1"/>
-          </a:effectRef>
-          <a:fontRef idx="minor">
-            <a:schemeClr val="lt1"/>
-          </a:fontRef>
-        </p:style>
-        <p:txBody>
-          <a:bodyPr rtlCol="0" anchor="ctr"/>
-          <a:lstStyle/>
-          <a:p>
-            <a:pPr algn="ctr">
-              <a:defRPr sz="1800" b="1">
+          <a:noFill/>
+        </p:spPr>
+        <p:txBody>
+          <a:bodyPr wrap="square">
+            <a:spAutoFit/>
+          </a:bodyPr>
+          <a:lstStyle/>
+          <a:p>
+            <a:pPr>
+              <a:defRPr sz="2600" b="1">
                 <a:solidFill>
                   <a:srgbClr val="F8FAFC"/>
                 </a:solidFill>
-              </a:defRPr>
-            </a:pPr>
-            <a:r>
-              <a:t>Enterprise Chain</a:t>
-            </a:r>
-          </a:p>
-          <a:p>
-            <a:pPr>
-              <a:spcBef>
-                <a:spcPts val="400"/>
-              </a:spcBef>
-              <a:defRPr sz="2200" b="1">
-                <a:solidFill>
-                  <a:srgbClr val="38BDF8"/>
-                </a:solidFill>
-              </a:defRPr>
-            </a:pPr>
-            <a:r>
-              <a:t>₹1,999 / month</a:t>
-            </a:r>
-          </a:p>
-          <a:p>
-            <a:pPr>
-              <a:spcBef>
-                <a:spcPts val="600"/>
-              </a:spcBef>
-              <a:defRPr sz="1100">
-                <a:solidFill>
-                  <a:srgbClr val="94A3B8"/>
-                </a:solidFill>
-              </a:defRPr>
-            </a:pPr>
-            <a:r>
-              <a:t>Multi-store franchises</a:t>
-            </a:r>
-          </a:p>
-          <a:p>
-            <a:pPr>
-              <a:spcBef>
-                <a:spcPts val="400"/>
-              </a:spcBef>
-              <a:defRPr sz="1100">
-                <a:solidFill>
-                  <a:srgbClr val="F8FAFC"/>
-                </a:solidFill>
-              </a:defRPr>
-            </a:pPr>
-            <a:r>
-              <a:t>• Multi-Branch Control</a:t>
-            </a:r>
-          </a:p>
-          <a:p>
-            <a:pPr>
-              <a:spcBef>
-                <a:spcPts val="400"/>
-              </a:spcBef>
-              <a:defRPr sz="1100">
-                <a:solidFill>
-                  <a:srgbClr val="F8FAFC"/>
-                </a:solidFill>
-              </a:defRPr>
-            </a:pPr>
-            <a:r>
-              <a:t>• Unlimited WhatsApp Receipts</a:t>
-            </a:r>
-          </a:p>
-          <a:p>
-            <a:pPr>
-              <a:spcBef>
-                <a:spcPts val="400"/>
-              </a:spcBef>
-              <a:defRPr sz="1100">
-                <a:solidFill>
-                  <a:srgbClr val="F8FAFC"/>
-                </a:solidFill>
-              </a:defRPr>
-            </a:pPr>
-            <a:r>
-              <a:t>• 100 Vapi Voice Mins/mo</a:t>
-            </a:r>
-          </a:p>
-          <a:p>
-            <a:pPr>
-              <a:spcBef>
-                <a:spcPts val="400"/>
-              </a:spcBef>
-              <a:defRPr sz="1100">
-                <a:solidFill>
-                  <a:srgbClr val="F8FAFC"/>
-                </a:solidFill>
-              </a:defRPr>
-            </a:pPr>
-            <a:r>
-              <a:t>• 10 Staff User Roles</a:t>
-            </a:r>
-          </a:p>
-        </p:txBody>
-      </p:sp>
+                <a:latin typeface="Trebuchet MS"/>
+              </a:defRPr>
+            </a:pPr>
+            <a:r>
+              <a:t>Competitive Advantage: Deep Moats vs Legacy &amp; Generic Apps</a:t>
+            </a:r>
+          </a:p>
+        </p:txBody>
+      </p:sp>
+      <p:graphicFrame>
+        <p:nvGraphicFramePr>
+          <p:cNvPr id="6" name="Table 5"/>
+          <p:cNvGraphicFramePr>
+            <a:graphicFrameLocks noGrp="1"/>
+          </p:cNvGraphicFramePr>
+          <p:nvPr/>
+        </p:nvGraphicFramePr>
+        <p:xfrm>
+          <a:off x="731520" y="1645920"/>
+          <a:ext cx="10698480" cy="4389120"/>
+        </p:xfrm>
+        <a:graphic>
+          <a:graphicData uri="http://schemas.openxmlformats.org/drawingml/2006/table">
+            <a:tbl>
+              <a:tblPr firstRow="1" bandRow="1">
+                <a:tableStyleId>{5C22544A-7EE6-4342-B048-85BDC9FD1C3A}</a:tableStyleId>
+              </a:tblPr>
+              <a:tblGrid>
+                <a:gridCol w="2674620"/>
+                <a:gridCol w="2674620"/>
+                <a:gridCol w="2674620"/>
+                <a:gridCol w="2674620"/>
+              </a:tblGrid>
+              <a:tr h="731520">
+                <a:tc>
+                  <a:txBody>
+                    <a:bodyPr/>
+                    <a:lstStyle/>
+                    <a:p>
+                      <a:pPr>
+                        <a:defRPr sz="1250" b="1">
+                          <a:solidFill>
+                            <a:srgbClr val="F8FAFC"/>
+                          </a:solidFill>
+                          <a:latin typeface="Trebuchet MS"/>
+                        </a:defRPr>
+                      </a:pPr>
+                      <a:r>
+                        <a:t>Capability / Feature</a:t>
+                      </a:r>
+                    </a:p>
+                  </a:txBody>
+                  <a:tcPr>
+                    <a:solidFill>
+                      <a:srgbClr val="182238"/>
+                    </a:solidFill>
+                  </a:tcPr>
+                </a:tc>
+                <a:tc>
+                  <a:txBody>
+                    <a:bodyPr/>
+                    <a:lstStyle/>
+                    <a:p>
+                      <a:pPr>
+                        <a:defRPr sz="1250" b="1">
+                          <a:solidFill>
+                            <a:srgbClr val="F59E0B"/>
+                          </a:solidFill>
+                          <a:latin typeface="Trebuchet MS"/>
+                        </a:defRPr>
+                      </a:pPr>
+                      <a:r>
+                        <a:t>Bizora AI (OmniMind)</a:t>
+                      </a:r>
+                    </a:p>
+                  </a:txBody>
+                  <a:tcPr>
+                    <a:solidFill>
+                      <a:srgbClr val="182238"/>
+                    </a:solidFill>
+                  </a:tcPr>
+                </a:tc>
+                <a:tc>
+                  <a:txBody>
+                    <a:bodyPr/>
+                    <a:lstStyle/>
+                    <a:p>
+                      <a:pPr>
+                        <a:defRPr sz="1250" b="1">
+                          <a:solidFill>
+                            <a:srgbClr val="F8FAFC"/>
+                          </a:solidFill>
+                          <a:latin typeface="Trebuchet MS"/>
+                        </a:defRPr>
+                      </a:pPr>
+                      <a:r>
+                        <a:t>Legacy POS (Tally/Busy)</a:t>
+                      </a:r>
+                    </a:p>
+                  </a:txBody>
+                  <a:tcPr>
+                    <a:solidFill>
+                      <a:srgbClr val="182238"/>
+                    </a:solidFill>
+                  </a:tcPr>
+                </a:tc>
+                <a:tc>
+                  <a:txBody>
+                    <a:bodyPr/>
+                    <a:lstStyle/>
+                    <a:p>
+                      <a:pPr>
+                        <a:defRPr sz="1250" b="1">
+                          <a:solidFill>
+                            <a:srgbClr val="F8FAFC"/>
+                          </a:solidFill>
+                          <a:latin typeface="Trebuchet MS"/>
+                        </a:defRPr>
+                      </a:pPr>
+                      <a:r>
+                        <a:t>Generic Apps (Khatabook/Vyapar)</a:t>
+                      </a:r>
+                    </a:p>
+                  </a:txBody>
+                  <a:tcPr>
+                    <a:solidFill>
+                      <a:srgbClr val="182238"/>
+                    </a:solidFill>
+                  </a:tcPr>
+                </a:tc>
+              </a:tr>
+              <a:tr h="731520">
+                <a:tc>
+                  <a:txBody>
+                    <a:bodyPr/>
+                    <a:lstStyle/>
+                    <a:p>
+                      <a:pPr>
+                        <a:defRPr sz="1200" b="0">
+                          <a:solidFill>
+                            <a:srgbClr val="F8FAFC"/>
+                          </a:solidFill>
+                          <a:latin typeface="Segoe UI"/>
+                        </a:defRPr>
+                      </a:pPr>
+                      <a:r>
+                        <a:t>Hardware Requirement</a:t>
+                      </a:r>
+                    </a:p>
+                  </a:txBody>
+                  <a:tcPr>
+                    <a:solidFill>
+                      <a:srgbClr val="101828"/>
+                    </a:solidFill>
+                  </a:tcPr>
+                </a:tc>
+                <a:tc>
+                  <a:txBody>
+                    <a:bodyPr/>
+                    <a:lstStyle/>
+                    <a:p>
+                      <a:pPr>
+                        <a:defRPr sz="1200" b="1">
+                          <a:solidFill>
+                            <a:srgbClr val="10B981"/>
+                          </a:solidFill>
+                          <a:latin typeface="Segoe UI"/>
+                        </a:defRPr>
+                      </a:pPr>
+                      <a:r>
+                        <a:t>Zero (Camera on Phone)</a:t>
+                      </a:r>
+                    </a:p>
+                  </a:txBody>
+                  <a:tcPr>
+                    <a:solidFill>
+                      <a:srgbClr val="101828"/>
+                    </a:solidFill>
+                  </a:tcPr>
+                </a:tc>
+                <a:tc>
+                  <a:txBody>
+                    <a:bodyPr/>
+                    <a:lstStyle/>
+                    <a:p>
+                      <a:pPr>
+                        <a:defRPr sz="1200" b="0">
+                          <a:solidFill>
+                            <a:srgbClr val="94A3B8"/>
+                          </a:solidFill>
+                          <a:latin typeface="Segoe UI"/>
+                        </a:defRPr>
+                      </a:pPr>
+                      <a:r>
+                        <a:t>₹45,000+ PC &amp; Laser Gun</a:t>
+                      </a:r>
+                    </a:p>
+                  </a:txBody>
+                  <a:tcPr>
+                    <a:solidFill>
+                      <a:srgbClr val="101828"/>
+                    </a:solidFill>
+                  </a:tcPr>
+                </a:tc>
+                <a:tc>
+                  <a:txBody>
+                    <a:bodyPr/>
+                    <a:lstStyle/>
+                    <a:p>
+                      <a:pPr>
+                        <a:defRPr sz="1200" b="0">
+                          <a:solidFill>
+                            <a:srgbClr val="94A3B8"/>
+                          </a:solidFill>
+                          <a:latin typeface="Segoe UI"/>
+                        </a:defRPr>
+                      </a:pPr>
+                      <a:r>
+                        <a:t>Basic Mobile Screen Only</a:t>
+                      </a:r>
+                    </a:p>
+                  </a:txBody>
+                  <a:tcPr>
+                    <a:solidFill>
+                      <a:srgbClr val="101828"/>
+                    </a:solidFill>
+                  </a:tcPr>
+                </a:tc>
+              </a:tr>
+              <a:tr h="731520">
+                <a:tc>
+                  <a:txBody>
+                    <a:bodyPr/>
+                    <a:lstStyle/>
+                    <a:p>
+                      <a:pPr>
+                        <a:defRPr sz="1200" b="0">
+                          <a:solidFill>
+                            <a:srgbClr val="F8FAFC"/>
+                          </a:solidFill>
+                          <a:latin typeface="Segoe UI"/>
+                        </a:defRPr>
+                      </a:pPr>
+                      <a:r>
+                        <a:t>Voice AI Supplier Restock</a:t>
+                      </a:r>
+                    </a:p>
+                  </a:txBody>
+                  <a:tcPr>
+                    <a:solidFill>
+                      <a:srgbClr val="101828"/>
+                    </a:solidFill>
+                  </a:tcPr>
+                </a:tc>
+                <a:tc>
+                  <a:txBody>
+                    <a:bodyPr/>
+                    <a:lstStyle/>
+                    <a:p>
+                      <a:pPr>
+                        <a:defRPr sz="1200" b="1">
+                          <a:solidFill>
+                            <a:srgbClr val="10B981"/>
+                          </a:solidFill>
+                          <a:latin typeface="Segoe UI"/>
+                        </a:defRPr>
+                      </a:pPr>
+                      <a:r>
+                        <a:t>Autonomous Hindi Calling</a:t>
+                      </a:r>
+                    </a:p>
+                  </a:txBody>
+                  <a:tcPr>
+                    <a:solidFill>
+                      <a:srgbClr val="101828"/>
+                    </a:solidFill>
+                  </a:tcPr>
+                </a:tc>
+                <a:tc>
+                  <a:txBody>
+                    <a:bodyPr/>
+                    <a:lstStyle/>
+                    <a:p>
+                      <a:pPr>
+                        <a:defRPr sz="1200" b="0">
+                          <a:solidFill>
+                            <a:srgbClr val="94A3B8"/>
+                          </a:solidFill>
+                          <a:latin typeface="Segoe UI"/>
+                        </a:defRPr>
+                      </a:pPr>
+                      <a:r>
+                        <a:t>❌ None</a:t>
+                      </a:r>
+                    </a:p>
+                  </a:txBody>
+                  <a:tcPr>
+                    <a:solidFill>
+                      <a:srgbClr val="101828"/>
+                    </a:solidFill>
+                  </a:tcPr>
+                </a:tc>
+                <a:tc>
+                  <a:txBody>
+                    <a:bodyPr/>
+                    <a:lstStyle/>
+                    <a:p>
+                      <a:pPr>
+                        <a:defRPr sz="1200" b="0">
+                          <a:solidFill>
+                            <a:srgbClr val="94A3B8"/>
+                          </a:solidFill>
+                          <a:latin typeface="Segoe UI"/>
+                        </a:defRPr>
+                      </a:pPr>
+                      <a:r>
+                        <a:t>❌ None</a:t>
+                      </a:r>
+                    </a:p>
+                  </a:txBody>
+                  <a:tcPr>
+                    <a:solidFill>
+                      <a:srgbClr val="101828"/>
+                    </a:solidFill>
+                  </a:tcPr>
+                </a:tc>
+              </a:tr>
+              <a:tr h="731520">
+                <a:tc>
+                  <a:txBody>
+                    <a:bodyPr/>
+                    <a:lstStyle/>
+                    <a:p>
+                      <a:pPr>
+                        <a:defRPr sz="1200" b="0">
+                          <a:solidFill>
+                            <a:srgbClr val="F8FAFC"/>
+                          </a:solidFill>
+                          <a:latin typeface="Segoe UI"/>
+                        </a:defRPr>
+                      </a:pPr>
+                      <a:r>
+                        <a:t>Customer Storefront</a:t>
+                      </a:r>
+                    </a:p>
+                  </a:txBody>
+                  <a:tcPr>
+                    <a:solidFill>
+                      <a:srgbClr val="101828"/>
+                    </a:solidFill>
+                  </a:tcPr>
+                </a:tc>
+                <a:tc>
+                  <a:txBody>
+                    <a:bodyPr/>
+                    <a:lstStyle/>
+                    <a:p>
+                      <a:pPr>
+                        <a:defRPr sz="1200" b="1">
+                          <a:solidFill>
+                            <a:srgbClr val="10B981"/>
+                          </a:solidFill>
+                          <a:latin typeface="Segoe UI"/>
+                        </a:defRPr>
+                      </a:pPr>
+                      <a:r>
+                        <a:t>10-Min Local Delivery</a:t>
+                      </a:r>
+                    </a:p>
+                  </a:txBody>
+                  <a:tcPr>
+                    <a:solidFill>
+                      <a:srgbClr val="101828"/>
+                    </a:solidFill>
+                  </a:tcPr>
+                </a:tc>
+                <a:tc>
+                  <a:txBody>
+                    <a:bodyPr/>
+                    <a:lstStyle/>
+                    <a:p>
+                      <a:pPr>
+                        <a:defRPr sz="1200" b="0">
+                          <a:solidFill>
+                            <a:srgbClr val="94A3B8"/>
+                          </a:solidFill>
+                          <a:latin typeface="Segoe UI"/>
+                        </a:defRPr>
+                      </a:pPr>
+                      <a:r>
+                        <a:t>❌ None</a:t>
+                      </a:r>
+                    </a:p>
+                  </a:txBody>
+                  <a:tcPr>
+                    <a:solidFill>
+                      <a:srgbClr val="101828"/>
+                    </a:solidFill>
+                  </a:tcPr>
+                </a:tc>
+                <a:tc>
+                  <a:txBody>
+                    <a:bodyPr/>
+                    <a:lstStyle/>
+                    <a:p>
+                      <a:pPr>
+                        <a:defRPr sz="1200" b="0">
+                          <a:solidFill>
+                            <a:srgbClr val="94A3B8"/>
+                          </a:solidFill>
+                          <a:latin typeface="Segoe UI"/>
+                        </a:defRPr>
+                      </a:pPr>
+                      <a:r>
+                        <a:t>Static WhatsApp Catalog</a:t>
+                      </a:r>
+                    </a:p>
+                  </a:txBody>
+                  <a:tcPr>
+                    <a:solidFill>
+                      <a:srgbClr val="101828"/>
+                    </a:solidFill>
+                  </a:tcPr>
+                </a:tc>
+              </a:tr>
+              <a:tr h="731520">
+                <a:tc>
+                  <a:txBody>
+                    <a:bodyPr/>
+                    <a:lstStyle/>
+                    <a:p>
+                      <a:pPr>
+                        <a:defRPr sz="1200" b="0">
+                          <a:solidFill>
+                            <a:srgbClr val="F8FAFC"/>
+                          </a:solidFill>
+                          <a:latin typeface="Segoe UI"/>
+                        </a:defRPr>
+                      </a:pPr>
+                      <a:r>
+                        <a:t>FIFO Expiry &amp; Markdown Radar</a:t>
+                      </a:r>
+                    </a:p>
+                  </a:txBody>
+                  <a:tcPr>
+                    <a:solidFill>
+                      <a:srgbClr val="101828"/>
+                    </a:solidFill>
+                  </a:tcPr>
+                </a:tc>
+                <a:tc>
+                  <a:txBody>
+                    <a:bodyPr/>
+                    <a:lstStyle/>
+                    <a:p>
+                      <a:pPr>
+                        <a:defRPr sz="1200" b="1">
+                          <a:solidFill>
+                            <a:srgbClr val="10B981"/>
+                          </a:solidFill>
+                          <a:latin typeface="Segoe UI"/>
+                        </a:defRPr>
+                      </a:pPr>
+                      <a:r>
+                        <a:t>Automated Loss Prevention</a:t>
+                      </a:r>
+                    </a:p>
+                  </a:txBody>
+                  <a:tcPr>
+                    <a:solidFill>
+                      <a:srgbClr val="101828"/>
+                    </a:solidFill>
+                  </a:tcPr>
+                </a:tc>
+                <a:tc>
+                  <a:txBody>
+                    <a:bodyPr/>
+                    <a:lstStyle/>
+                    <a:p>
+                      <a:pPr>
+                        <a:defRPr sz="1200" b="0">
+                          <a:solidFill>
+                            <a:srgbClr val="94A3B8"/>
+                          </a:solidFill>
+                          <a:latin typeface="Segoe UI"/>
+                        </a:defRPr>
+                      </a:pPr>
+                      <a:r>
+                        <a:t>Manual Audits Only</a:t>
+                      </a:r>
+                    </a:p>
+                  </a:txBody>
+                  <a:tcPr>
+                    <a:solidFill>
+                      <a:srgbClr val="101828"/>
+                    </a:solidFill>
+                  </a:tcPr>
+                </a:tc>
+                <a:tc>
+                  <a:txBody>
+                    <a:bodyPr/>
+                    <a:lstStyle/>
+                    <a:p>
+                      <a:pPr>
+                        <a:defRPr sz="1200" b="0">
+                          <a:solidFill>
+                            <a:srgbClr val="94A3B8"/>
+                          </a:solidFill>
+                          <a:latin typeface="Segoe UI"/>
+                        </a:defRPr>
+                      </a:pPr>
+                      <a:r>
+                        <a:t>❌ None</a:t>
+                      </a:r>
+                    </a:p>
+                  </a:txBody>
+                  <a:tcPr>
+                    <a:solidFill>
+                      <a:srgbClr val="101828"/>
+                    </a:solidFill>
+                  </a:tcPr>
+                </a:tc>
+              </a:tr>
+              <a:tr h="731520">
+                <a:tc>
+                  <a:txBody>
+                    <a:bodyPr/>
+                    <a:lstStyle/>
+                    <a:p>
+                      <a:pPr>
+                        <a:defRPr sz="1200" b="0">
+                          <a:solidFill>
+                            <a:srgbClr val="F8FAFC"/>
+                          </a:solidFill>
+                          <a:latin typeface="Segoe UI"/>
+                        </a:defRPr>
+                      </a:pPr>
+                      <a:r>
+                        <a:t>Multi-Portal Synchronization</a:t>
+                      </a:r>
+                    </a:p>
+                  </a:txBody>
+                  <a:tcPr>
+                    <a:solidFill>
+                      <a:srgbClr val="101828"/>
+                    </a:solidFill>
+                  </a:tcPr>
+                </a:tc>
+                <a:tc>
+                  <a:txBody>
+                    <a:bodyPr/>
+                    <a:lstStyle/>
+                    <a:p>
+                      <a:pPr>
+                        <a:defRPr sz="1200" b="1">
+                          <a:solidFill>
+                            <a:srgbClr val="10B981"/>
+                          </a:solidFill>
+                          <a:latin typeface="Segoe UI"/>
+                        </a:defRPr>
+                      </a:pPr>
+                      <a:r>
+                        <a:t>5 Portals Live Synced</a:t>
+                      </a:r>
+                    </a:p>
+                  </a:txBody>
+                  <a:tcPr>
+                    <a:solidFill>
+                      <a:srgbClr val="101828"/>
+                    </a:solidFill>
+                  </a:tcPr>
+                </a:tc>
+                <a:tc>
+                  <a:txBody>
+                    <a:bodyPr/>
+                    <a:lstStyle/>
+                    <a:p>
+                      <a:pPr>
+                        <a:defRPr sz="1200" b="0">
+                          <a:solidFill>
+                            <a:srgbClr val="94A3B8"/>
+                          </a:solidFill>
+                          <a:latin typeface="Segoe UI"/>
+                        </a:defRPr>
+                      </a:pPr>
+                      <a:r>
+                        <a:t>Single PC Database</a:t>
+                      </a:r>
+                    </a:p>
+                  </a:txBody>
+                  <a:tcPr>
+                    <a:solidFill>
+                      <a:srgbClr val="101828"/>
+                    </a:solidFill>
+                  </a:tcPr>
+                </a:tc>
+                <a:tc>
+                  <a:txBody>
+                    <a:bodyPr/>
+                    <a:lstStyle/>
+                    <a:p>
+                      <a:pPr>
+                        <a:defRPr sz="1200" b="0">
+                          <a:solidFill>
+                            <a:srgbClr val="94A3B8"/>
+                          </a:solidFill>
+                          <a:latin typeface="Segoe UI"/>
+                        </a:defRPr>
+                      </a:pPr>
+                      <a:r>
+                        <a:t>Single User Mobile App</a:t>
+                      </a:r>
+                    </a:p>
+                  </a:txBody>
+                  <a:tcPr>
+                    <a:solidFill>
+                      <a:srgbClr val="101828"/>
+                    </a:solidFill>
+                  </a:tcPr>
+                </a:tc>
+              </a:tr>
+            </a:tbl>
+          </a:graphicData>
+        </a:graphic>
+      </p:graphicFrame>
     </p:spTree>
   </p:cSld>
   <p:clrMapOvr>
@@ -5555,7 +6075,7 @@
             <a:avLst/>
           </a:prstGeom>
           <a:solidFill>
-            <a:srgbClr val="090D16"/>
+            <a:srgbClr val="0A0E17"/>
           </a:solidFill>
           <a:ln>
             <a:noFill/>
@@ -5585,95 +6105,23 @@
       </p:sp>
       <p:sp>
         <p:nvSpPr>
-          <p:cNvPr id="3" name="TextBox 2"/>
-          <p:cNvSpPr txBox="1"/>
+          <p:cNvPr id="3" name="Rectangle 2"/>
+          <p:cNvSpPr/>
           <p:nvPr/>
         </p:nvSpPr>
         <p:spPr>
           <a:xfrm>
-            <a:off x="731520" y="365760"/>
-            <a:ext cx="10515600" cy="320040"/>
+            <a:off x="0" y="0"/>
+            <a:ext cx="12191695" cy="73152"/>
           </a:xfrm>
           <a:prstGeom prst="rect">
             <a:avLst/>
           </a:prstGeom>
-          <a:noFill/>
-        </p:spPr>
-        <p:txBody>
-          <a:bodyPr wrap="none">
-            <a:spAutoFit/>
-          </a:bodyPr>
-          <a:lstStyle/>
-          <a:p>
-            <a:pPr>
-              <a:defRPr sz="1100" b="1">
-                <a:solidFill>
-                  <a:srgbClr val="38BDF8"/>
-                </a:solidFill>
-              </a:defRPr>
-            </a:pPr>
-            <a:r>
-              <a:t>BIZORA AI — PITCH DECK</a:t>
-            </a:r>
-          </a:p>
-        </p:txBody>
-      </p:sp>
-      <p:sp>
-        <p:nvSpPr>
-          <p:cNvPr id="4" name="TextBox 3"/>
-          <p:cNvSpPr txBox="1"/>
-          <p:nvPr/>
-        </p:nvSpPr>
-        <p:spPr>
-          <a:xfrm>
-            <a:off x="731520" y="640080"/>
-            <a:ext cx="10515600" cy="731520"/>
-          </a:xfrm>
-          <a:prstGeom prst="rect">
-            <a:avLst/>
-          </a:prstGeom>
-          <a:noFill/>
-        </p:spPr>
-        <p:txBody>
-          <a:bodyPr wrap="none">
-            <a:spAutoFit/>
-          </a:bodyPr>
-          <a:lstStyle/>
-          <a:p>
-            <a:pPr>
-              <a:defRPr sz="2800" b="1">
-                <a:solidFill>
-                  <a:srgbClr val="F8FAFC"/>
-                </a:solidFill>
-              </a:defRPr>
-            </a:pPr>
-            <a:r>
-              <a:t>The Ask: Operational Scale &amp; Infrastructure Capital</a:t>
-            </a:r>
-          </a:p>
-        </p:txBody>
-      </p:sp>
-      <p:sp>
-        <p:nvSpPr>
-          <p:cNvPr id="5" name="Rounded Rectangle 4"/>
-          <p:cNvSpPr/>
-          <p:nvPr/>
-        </p:nvSpPr>
-        <p:spPr>
-          <a:xfrm>
-            <a:off x="731520" y="1645920"/>
-            <a:ext cx="10698480" cy="1645920"/>
-          </a:xfrm>
-          <a:prstGeom prst="roundRect">
-            <a:avLst/>
-          </a:prstGeom>
           <a:solidFill>
-            <a:srgbClr val="0F172A"/>
+            <a:srgbClr val="F59E0B"/>
           </a:solidFill>
           <a:ln>
-            <a:solidFill>
-              <a:srgbClr val="F59E0B"/>
-            </a:solidFill>
+            <a:noFill/>
           </a:ln>
         </p:spPr>
         <p:style>
@@ -5694,30 +6142,78 @@
           <a:bodyPr rtlCol="0" anchor="ctr"/>
           <a:lstStyle/>
           <a:p>
-            <a:pPr algn="ctr">
-              <a:defRPr sz="2200" b="1">
-                <a:solidFill>
-                  <a:srgbClr val="F59E0B"/>
-                </a:solidFill>
-              </a:defRPr>
-            </a:pPr>
-            <a:r>
-              <a:t>The Ask: Transitioning from Staging to Commercial Launch</a:t>
-            </a:r>
-          </a:p>
+            <a:pPr algn="ctr"/>
+          </a:p>
+        </p:txBody>
+      </p:sp>
+      <p:sp>
+        <p:nvSpPr>
+          <p:cNvPr id="4" name="TextBox 3"/>
+          <p:cNvSpPr txBox="1"/>
+          <p:nvPr/>
+        </p:nvSpPr>
+        <p:spPr>
+          <a:xfrm>
+            <a:off x="731520" y="365760"/>
+            <a:ext cx="10698480" cy="274320"/>
+          </a:xfrm>
+          <a:prstGeom prst="rect">
+            <a:avLst/>
+          </a:prstGeom>
+          <a:noFill/>
+        </p:spPr>
+        <p:txBody>
+          <a:bodyPr wrap="square">
+            <a:spAutoFit/>
+          </a:bodyPr>
+          <a:lstStyle/>
           <a:p>
             <a:pPr>
-              <a:spcBef>
-                <a:spcPts val="800"/>
-              </a:spcBef>
-              <a:defRPr sz="1350">
+              <a:defRPr sz="1000" b="1">
+                <a:solidFill>
+                  <a:srgbClr val="38BDF8"/>
+                </a:solidFill>
+                <a:latin typeface="Segoe UI"/>
+              </a:defRPr>
+            </a:pPr>
+            <a:r>
+              <a:t>BUSINESS MODEL</a:t>
+            </a:r>
+          </a:p>
+        </p:txBody>
+      </p:sp>
+      <p:sp>
+        <p:nvSpPr>
+          <p:cNvPr id="5" name="TextBox 4"/>
+          <p:cNvSpPr txBox="1"/>
+          <p:nvPr/>
+        </p:nvSpPr>
+        <p:spPr>
+          <a:xfrm>
+            <a:off x="731520" y="621792"/>
+            <a:ext cx="10698480" cy="640080"/>
+          </a:xfrm>
+          <a:prstGeom prst="rect">
+            <a:avLst/>
+          </a:prstGeom>
+          <a:noFill/>
+        </p:spPr>
+        <p:txBody>
+          <a:bodyPr wrap="square">
+            <a:spAutoFit/>
+          </a:bodyPr>
+          <a:lstStyle/>
+          <a:p>
+            <a:pPr>
+              <a:defRPr sz="2600" b="1">
                 <a:solidFill>
                   <a:srgbClr val="F8FAFC"/>
                 </a:solidFill>
-              </a:defRPr>
-            </a:pPr>
-            <a:r>
-              <a:t>The product code is 100% complete across all 5 portals with zero debt. Capital is strictly deployed for production infrastructure (Render Paid Web Services, MongoDB Atlas M10 dedicated cluster) and merchant onboarding acquisition.</a:t>
+                <a:latin typeface="Trebuchet MS"/>
+              </a:defRPr>
+            </a:pPr>
+            <a:r>
+              <a:t>Monetization: Modular High-Margin SaaS Subscriptions</a:t>
             </a:r>
           </a:p>
         </p:txBody>
@@ -5730,14 +6226,483 @@
         </p:nvSpPr>
         <p:spPr>
           <a:xfrm>
-            <a:off x="731520" y="3566160"/>
-            <a:ext cx="2560320" cy="2560320"/>
+            <a:off x="731520" y="1645920"/>
+            <a:ext cx="3474720" cy="3291840"/>
           </a:xfrm>
           <a:prstGeom prst="roundRect">
             <a:avLst/>
           </a:prstGeom>
           <a:solidFill>
-            <a:srgbClr val="0F172A"/>
+            <a:srgbClr val="101828"/>
+          </a:solidFill>
+          <a:ln w="19050">
+            <a:solidFill>
+              <a:srgbClr val="1E293B"/>
+            </a:solidFill>
+          </a:ln>
+        </p:spPr>
+        <p:style>
+          <a:lnRef idx="1">
+            <a:schemeClr val="accent1"/>
+          </a:lnRef>
+          <a:fillRef idx="3">
+            <a:schemeClr val="accent1"/>
+          </a:fillRef>
+          <a:effectRef idx="2">
+            <a:schemeClr val="accent1"/>
+          </a:effectRef>
+          <a:fontRef idx="minor">
+            <a:schemeClr val="lt1"/>
+          </a:fontRef>
+        </p:style>
+        <p:txBody>
+          <a:bodyPr rtlCol="0" anchor="ctr" wrap="square"/>
+          <a:lstStyle/>
+          <a:p>
+            <a:pPr algn="ctr">
+              <a:defRPr sz="1800" b="1">
+                <a:solidFill>
+                  <a:srgbClr val="F8FAFC"/>
+                </a:solidFill>
+                <a:latin typeface="Trebuchet MS"/>
+              </a:defRPr>
+            </a:pPr>
+            <a:r>
+              <a:t>Kirana / Starter</a:t>
+            </a:r>
+          </a:p>
+          <a:p>
+            <a:pPr>
+              <a:spcBef>
+                <a:spcPts val="400"/>
+              </a:spcBef>
+              <a:defRPr sz="2200" b="1">
+                <a:solidFill>
+                  <a:srgbClr val="38BDF8"/>
+                </a:solidFill>
+                <a:latin typeface="Trebuchet MS"/>
+              </a:defRPr>
+            </a:pPr>
+            <a:r>
+              <a:t>₹0 / Free Forever</a:t>
+            </a:r>
+          </a:p>
+          <a:p>
+            <a:pPr>
+              <a:spcBef>
+                <a:spcPts val="400"/>
+              </a:spcBef>
+              <a:defRPr sz="1100">
+                <a:solidFill>
+                  <a:srgbClr val="94A3B8"/>
+                </a:solidFill>
+                <a:latin typeface="Segoe UI"/>
+              </a:defRPr>
+            </a:pPr>
+            <a:r>
+              <a:t>Single-counter kiranas</a:t>
+            </a:r>
+          </a:p>
+          <a:p>
+            <a:pPr>
+              <a:spcBef>
+                <a:spcPts val="300"/>
+              </a:spcBef>
+              <a:defRPr sz="1050">
+                <a:solidFill>
+                  <a:srgbClr val="F8FAFC"/>
+                </a:solidFill>
+                <a:latin typeface="Segoe UI"/>
+              </a:defRPr>
+            </a:pPr>
+            <a:r>
+              <a:t>✓ Camera Barcode POS</a:t>
+            </a:r>
+          </a:p>
+          <a:p>
+            <a:pPr>
+              <a:spcBef>
+                <a:spcPts val="300"/>
+              </a:spcBef>
+              <a:defRPr sz="1050">
+                <a:solidFill>
+                  <a:srgbClr val="F8FAFC"/>
+                </a:solidFill>
+                <a:latin typeface="Segoe UI"/>
+              </a:defRPr>
+            </a:pPr>
+            <a:r>
+              <a:t>✓ Up to 200 Products</a:t>
+            </a:r>
+          </a:p>
+          <a:p>
+            <a:pPr>
+              <a:spcBef>
+                <a:spcPts val="300"/>
+              </a:spcBef>
+              <a:defRPr sz="1050">
+                <a:solidFill>
+                  <a:srgbClr val="F8FAFC"/>
+                </a:solidFill>
+                <a:latin typeface="Segoe UI"/>
+              </a:defRPr>
+            </a:pPr>
+            <a:r>
+              <a:t>✓ Hindi &amp; English UI</a:t>
+            </a:r>
+          </a:p>
+          <a:p>
+            <a:pPr>
+              <a:spcBef>
+                <a:spcPts val="300"/>
+              </a:spcBef>
+              <a:defRPr sz="1050">
+                <a:solidFill>
+                  <a:srgbClr val="F8FAFC"/>
+                </a:solidFill>
+                <a:latin typeface="Segoe UI"/>
+              </a:defRPr>
+            </a:pPr>
+            <a:r>
+              <a:t>✓ 1 Counter User</a:t>
+            </a:r>
+          </a:p>
+        </p:txBody>
+      </p:sp>
+      <p:sp>
+        <p:nvSpPr>
+          <p:cNvPr id="7" name="Rounded Rectangle 6"/>
+          <p:cNvSpPr/>
+          <p:nvPr/>
+        </p:nvSpPr>
+        <p:spPr>
+          <a:xfrm>
+            <a:off x="4343400" y="1645920"/>
+            <a:ext cx="3474720" cy="3291840"/>
+          </a:xfrm>
+          <a:prstGeom prst="roundRect">
+            <a:avLst/>
+          </a:prstGeom>
+          <a:solidFill>
+            <a:srgbClr val="101828"/>
+          </a:solidFill>
+          <a:ln w="19050">
+            <a:solidFill>
+              <a:srgbClr val="F59E0B"/>
+            </a:solidFill>
+          </a:ln>
+        </p:spPr>
+        <p:style>
+          <a:lnRef idx="1">
+            <a:schemeClr val="accent1"/>
+          </a:lnRef>
+          <a:fillRef idx="3">
+            <a:schemeClr val="accent1"/>
+          </a:fillRef>
+          <a:effectRef idx="2">
+            <a:schemeClr val="accent1"/>
+          </a:effectRef>
+          <a:fontRef idx="minor">
+            <a:schemeClr val="lt1"/>
+          </a:fontRef>
+        </p:style>
+        <p:txBody>
+          <a:bodyPr rtlCol="0" anchor="ctr" wrap="square"/>
+          <a:lstStyle/>
+          <a:p>
+            <a:pPr algn="ctr">
+              <a:defRPr sz="1800" b="1">
+                <a:solidFill>
+                  <a:srgbClr val="F59E0B"/>
+                </a:solidFill>
+                <a:latin typeface="Trebuchet MS"/>
+              </a:defRPr>
+            </a:pPr>
+            <a:r>
+              <a:t>Retailer / Growth</a:t>
+            </a:r>
+          </a:p>
+          <a:p>
+            <a:pPr>
+              <a:spcBef>
+                <a:spcPts val="400"/>
+              </a:spcBef>
+              <a:defRPr sz="2200" b="1">
+                <a:solidFill>
+                  <a:srgbClr val="38BDF8"/>
+                </a:solidFill>
+                <a:latin typeface="Trebuchet MS"/>
+              </a:defRPr>
+            </a:pPr>
+            <a:r>
+              <a:t>₹699 / month</a:t>
+            </a:r>
+          </a:p>
+          <a:p>
+            <a:pPr>
+              <a:spcBef>
+                <a:spcPts val="400"/>
+              </a:spcBef>
+              <a:defRPr sz="1100">
+                <a:solidFill>
+                  <a:srgbClr val="94A3B8"/>
+                </a:solidFill>
+                <a:latin typeface="Segoe UI"/>
+              </a:defRPr>
+            </a:pPr>
+            <a:r>
+              <a:t>Supermarkets, apparel &amp; retail</a:t>
+            </a:r>
+          </a:p>
+          <a:p>
+            <a:pPr>
+              <a:spcBef>
+                <a:spcPts val="300"/>
+              </a:spcBef>
+              <a:defRPr sz="1050">
+                <a:solidFill>
+                  <a:srgbClr val="F8FAFC"/>
+                </a:solidFill>
+                <a:latin typeface="Segoe UI"/>
+              </a:defRPr>
+            </a:pPr>
+            <a:r>
+              <a:t>✓ Unlimited Billing &amp; Products</a:t>
+            </a:r>
+          </a:p>
+          <a:p>
+            <a:pPr>
+              <a:spcBef>
+                <a:spcPts val="300"/>
+              </a:spcBef>
+              <a:defRPr sz="1050">
+                <a:solidFill>
+                  <a:srgbClr val="F8FAFC"/>
+                </a:solidFill>
+                <a:latin typeface="Segoe UI"/>
+              </a:defRPr>
+            </a:pPr>
+            <a:r>
+              <a:t>✓ 500 WhatsApp Bills/mo</a:t>
+            </a:r>
+          </a:p>
+          <a:p>
+            <a:pPr>
+              <a:spcBef>
+                <a:spcPts val="300"/>
+              </a:spcBef>
+              <a:defRPr sz="1050">
+                <a:solidFill>
+                  <a:srgbClr val="F8FAFC"/>
+                </a:solidFill>
+                <a:latin typeface="Segoe UI"/>
+              </a:defRPr>
+            </a:pPr>
+            <a:r>
+              <a:t>✓ 10 Vapi Voice Calls/mo</a:t>
+            </a:r>
+          </a:p>
+          <a:p>
+            <a:pPr>
+              <a:spcBef>
+                <a:spcPts val="300"/>
+              </a:spcBef>
+              <a:defRPr sz="1050">
+                <a:solidFill>
+                  <a:srgbClr val="F8FAFC"/>
+                </a:solidFill>
+                <a:latin typeface="Segoe UI"/>
+              </a:defRPr>
+            </a:pPr>
+            <a:r>
+              <a:t>✓ FIFO Expiry Radar</a:t>
+            </a:r>
+          </a:p>
+          <a:p>
+            <a:pPr>
+              <a:spcBef>
+                <a:spcPts val="300"/>
+              </a:spcBef>
+              <a:defRPr sz="1050">
+                <a:solidFill>
+                  <a:srgbClr val="F8FAFC"/>
+                </a:solidFill>
+                <a:latin typeface="Segoe UI"/>
+              </a:defRPr>
+            </a:pPr>
+            <a:r>
+              <a:t>✓ 3 Staff Accounts</a:t>
+            </a:r>
+          </a:p>
+        </p:txBody>
+      </p:sp>
+      <p:sp>
+        <p:nvSpPr>
+          <p:cNvPr id="8" name="Rounded Rectangle 7"/>
+          <p:cNvSpPr/>
+          <p:nvPr/>
+        </p:nvSpPr>
+        <p:spPr>
+          <a:xfrm>
+            <a:off x="7955280" y="1645920"/>
+            <a:ext cx="3474720" cy="3291840"/>
+          </a:xfrm>
+          <a:prstGeom prst="roundRect">
+            <a:avLst/>
+          </a:prstGeom>
+          <a:solidFill>
+            <a:srgbClr val="101828"/>
+          </a:solidFill>
+          <a:ln w="19050">
+            <a:solidFill>
+              <a:srgbClr val="38BDF8"/>
+            </a:solidFill>
+          </a:ln>
+        </p:spPr>
+        <p:style>
+          <a:lnRef idx="1">
+            <a:schemeClr val="accent1"/>
+          </a:lnRef>
+          <a:fillRef idx="3">
+            <a:schemeClr val="accent1"/>
+          </a:fillRef>
+          <a:effectRef idx="2">
+            <a:schemeClr val="accent1"/>
+          </a:effectRef>
+          <a:fontRef idx="minor">
+            <a:schemeClr val="lt1"/>
+          </a:fontRef>
+        </p:style>
+        <p:txBody>
+          <a:bodyPr rtlCol="0" anchor="ctr" wrap="square"/>
+          <a:lstStyle/>
+          <a:p>
+            <a:pPr algn="ctr">
+              <a:defRPr sz="1800" b="1">
+                <a:solidFill>
+                  <a:srgbClr val="38BDF8"/>
+                </a:solidFill>
+                <a:latin typeface="Trebuchet MS"/>
+              </a:defRPr>
+            </a:pPr>
+            <a:r>
+              <a:t>Enterprise Chain</a:t>
+            </a:r>
+          </a:p>
+          <a:p>
+            <a:pPr>
+              <a:spcBef>
+                <a:spcPts val="400"/>
+              </a:spcBef>
+              <a:defRPr sz="2200" b="1">
+                <a:solidFill>
+                  <a:srgbClr val="38BDF8"/>
+                </a:solidFill>
+                <a:latin typeface="Trebuchet MS"/>
+              </a:defRPr>
+            </a:pPr>
+            <a:r>
+              <a:t>₹1,999 / month</a:t>
+            </a:r>
+          </a:p>
+          <a:p>
+            <a:pPr>
+              <a:spcBef>
+                <a:spcPts val="400"/>
+              </a:spcBef>
+              <a:defRPr sz="1100">
+                <a:solidFill>
+                  <a:srgbClr val="94A3B8"/>
+                </a:solidFill>
+                <a:latin typeface="Segoe UI"/>
+              </a:defRPr>
+            </a:pPr>
+            <a:r>
+              <a:t>Multi-store franchises</a:t>
+            </a:r>
+          </a:p>
+          <a:p>
+            <a:pPr>
+              <a:spcBef>
+                <a:spcPts val="300"/>
+              </a:spcBef>
+              <a:defRPr sz="1050">
+                <a:solidFill>
+                  <a:srgbClr val="F8FAFC"/>
+                </a:solidFill>
+                <a:latin typeface="Segoe UI"/>
+              </a:defRPr>
+            </a:pPr>
+            <a:r>
+              <a:t>✓ Multi-Branch Control</a:t>
+            </a:r>
+          </a:p>
+          <a:p>
+            <a:pPr>
+              <a:spcBef>
+                <a:spcPts val="300"/>
+              </a:spcBef>
+              <a:defRPr sz="1050">
+                <a:solidFill>
+                  <a:srgbClr val="F8FAFC"/>
+                </a:solidFill>
+                <a:latin typeface="Segoe UI"/>
+              </a:defRPr>
+            </a:pPr>
+            <a:r>
+              <a:t>✓ Unlimited WhatsApp Receipts</a:t>
+            </a:r>
+          </a:p>
+          <a:p>
+            <a:pPr>
+              <a:spcBef>
+                <a:spcPts val="300"/>
+              </a:spcBef>
+              <a:defRPr sz="1050">
+                <a:solidFill>
+                  <a:srgbClr val="F8FAFC"/>
+                </a:solidFill>
+                <a:latin typeface="Segoe UI"/>
+              </a:defRPr>
+            </a:pPr>
+            <a:r>
+              <a:t>✓ 100 Vapi Voice Mins/mo</a:t>
+            </a:r>
+          </a:p>
+          <a:p>
+            <a:pPr>
+              <a:spcBef>
+                <a:spcPts val="300"/>
+              </a:spcBef>
+              <a:defRPr sz="1050">
+                <a:solidFill>
+                  <a:srgbClr val="F8FAFC"/>
+                </a:solidFill>
+                <a:latin typeface="Segoe UI"/>
+              </a:defRPr>
+            </a:pPr>
+            <a:r>
+              <a:t>✓ 10 Staff User Roles</a:t>
+            </a:r>
+          </a:p>
+        </p:txBody>
+      </p:sp>
+      <p:sp>
+        <p:nvSpPr>
+          <p:cNvPr id="9" name="Rounded Rectangle 8"/>
+          <p:cNvSpPr/>
+          <p:nvPr/>
+        </p:nvSpPr>
+        <p:spPr>
+          <a:xfrm>
+            <a:off x="731520" y="5166360"/>
+            <a:ext cx="10698480" cy="1143000"/>
+          </a:xfrm>
+          <a:prstGeom prst="roundRect">
+            <a:avLst/>
+          </a:prstGeom>
+          <a:solidFill>
+            <a:srgbClr val="182238"/>
           </a:solidFill>
           <a:ln>
             <a:solidFill>
@@ -5760,18 +6725,266 @@
           </a:fontRef>
         </p:style>
         <p:txBody>
+          <a:bodyPr rtlCol="0" anchor="ctr" wrap="square"/>
+          <a:lstStyle/>
+          <a:p>
+            <a:pPr algn="ctr">
+              <a:defRPr sz="1100" b="1">
+                <a:solidFill>
+                  <a:srgbClr val="F59E0B"/>
+                </a:solidFill>
+                <a:latin typeface="Trebuchet MS"/>
+              </a:defRPr>
+            </a:pPr>
+            <a:r>
+              <a:t>📈 SAAS UNIT ECONOMICS HIGHLIGHTS</a:t>
+            </a:r>
+          </a:p>
+          <a:p>
+            <a:pPr>
+              <a:spcBef>
+                <a:spcPts val="400"/>
+              </a:spcBef>
+              <a:defRPr sz="1300" b="1">
+                <a:solidFill>
+                  <a:srgbClr val="F8FAFC"/>
+                </a:solidFill>
+                <a:latin typeface="Segoe UI"/>
+              </a:defRPr>
+            </a:pPr>
+            <a:r>
+              <a:t>Blended ARPU: ₹699/mo   |   Blended CAC: ₹850   |   Customer LTV: ₹14,500   |   LTV/CAC Ratio: 17.0x   |   Gross Margin: 82%+</a:t>
+            </a:r>
+          </a:p>
+        </p:txBody>
+      </p:sp>
+    </p:spTree>
+  </p:cSld>
+  <p:clrMapOvr>
+    <a:masterClrMapping/>
+  </p:clrMapOvr>
+</p:sld>
+</file>
+
+<file path=ppt/slides/slide8.xml><?xml version="1.0" encoding="utf-8"?>
+<p:sld xmlns:a="http://schemas.openxmlformats.org/drawingml/2006/main" xmlns:p="http://schemas.openxmlformats.org/presentationml/2006/main" xmlns:r="http://schemas.openxmlformats.org/officeDocument/2006/relationships">
+  <p:cSld>
+    <p:spTree>
+      <p:nvGrpSpPr>
+        <p:cNvPr id="1" name=""/>
+        <p:cNvGrpSpPr/>
+        <p:nvPr/>
+      </p:nvGrpSpPr>
+      <p:grpSpPr/>
+      <p:sp>
+        <p:nvSpPr>
+          <p:cNvPr id="2" name="Rectangle 1"/>
+          <p:cNvSpPr/>
+          <p:nvPr/>
+        </p:nvSpPr>
+        <p:spPr>
+          <a:xfrm>
+            <a:off x="0" y="0"/>
+            <a:ext cx="12191695" cy="6858000"/>
+          </a:xfrm>
+          <a:prstGeom prst="rect">
+            <a:avLst/>
+          </a:prstGeom>
+          <a:solidFill>
+            <a:srgbClr val="0A0E17"/>
+          </a:solidFill>
+          <a:ln>
+            <a:noFill/>
+          </a:ln>
+        </p:spPr>
+        <p:style>
+          <a:lnRef idx="1">
+            <a:schemeClr val="accent1"/>
+          </a:lnRef>
+          <a:fillRef idx="3">
+            <a:schemeClr val="accent1"/>
+          </a:fillRef>
+          <a:effectRef idx="2">
+            <a:schemeClr val="accent1"/>
+          </a:effectRef>
+          <a:fontRef idx="minor">
+            <a:schemeClr val="lt1"/>
+          </a:fontRef>
+        </p:style>
+        <p:txBody>
           <a:bodyPr rtlCol="0" anchor="ctr"/>
           <a:lstStyle/>
           <a:p>
+            <a:pPr algn="ctr"/>
+          </a:p>
+        </p:txBody>
+      </p:sp>
+      <p:sp>
+        <p:nvSpPr>
+          <p:cNvPr id="3" name="Rectangle 2"/>
+          <p:cNvSpPr/>
+          <p:nvPr/>
+        </p:nvSpPr>
+        <p:spPr>
+          <a:xfrm>
+            <a:off x="0" y="0"/>
+            <a:ext cx="12191695" cy="73152"/>
+          </a:xfrm>
+          <a:prstGeom prst="rect">
+            <a:avLst/>
+          </a:prstGeom>
+          <a:solidFill>
+            <a:srgbClr val="F59E0B"/>
+          </a:solidFill>
+          <a:ln>
+            <a:noFill/>
+          </a:ln>
+        </p:spPr>
+        <p:style>
+          <a:lnRef idx="1">
+            <a:schemeClr val="accent1"/>
+          </a:lnRef>
+          <a:fillRef idx="3">
+            <a:schemeClr val="accent1"/>
+          </a:fillRef>
+          <a:effectRef idx="2">
+            <a:schemeClr val="accent1"/>
+          </a:effectRef>
+          <a:fontRef idx="minor">
+            <a:schemeClr val="lt1"/>
+          </a:fontRef>
+        </p:style>
+        <p:txBody>
+          <a:bodyPr rtlCol="0" anchor="ctr"/>
+          <a:lstStyle/>
+          <a:p>
+            <a:pPr algn="ctr"/>
+          </a:p>
+        </p:txBody>
+      </p:sp>
+      <p:sp>
+        <p:nvSpPr>
+          <p:cNvPr id="4" name="TextBox 3"/>
+          <p:cNvSpPr txBox="1"/>
+          <p:nvPr/>
+        </p:nvSpPr>
+        <p:spPr>
+          <a:xfrm>
+            <a:off x="731520" y="365760"/>
+            <a:ext cx="10698480" cy="274320"/>
+          </a:xfrm>
+          <a:prstGeom prst="rect">
+            <a:avLst/>
+          </a:prstGeom>
+          <a:noFill/>
+        </p:spPr>
+        <p:txBody>
+          <a:bodyPr wrap="square">
+            <a:spAutoFit/>
+          </a:bodyPr>
+          <a:lstStyle/>
+          <a:p>
+            <a:pPr>
+              <a:defRPr sz="1000" b="1">
+                <a:solidFill>
+                  <a:srgbClr val="38BDF8"/>
+                </a:solidFill>
+                <a:latin typeface="Segoe UI"/>
+              </a:defRPr>
+            </a:pPr>
+            <a:r>
+              <a:t>INVESTMENT</a:t>
+            </a:r>
+          </a:p>
+        </p:txBody>
+      </p:sp>
+      <p:sp>
+        <p:nvSpPr>
+          <p:cNvPr id="5" name="TextBox 4"/>
+          <p:cNvSpPr txBox="1"/>
+          <p:nvPr/>
+        </p:nvSpPr>
+        <p:spPr>
+          <a:xfrm>
+            <a:off x="731520" y="621792"/>
+            <a:ext cx="10698480" cy="640080"/>
+          </a:xfrm>
+          <a:prstGeom prst="rect">
+            <a:avLst/>
+          </a:prstGeom>
+          <a:noFill/>
+        </p:spPr>
+        <p:txBody>
+          <a:bodyPr wrap="square">
+            <a:spAutoFit/>
+          </a:bodyPr>
+          <a:lstStyle/>
+          <a:p>
+            <a:pPr>
+              <a:defRPr sz="2600" b="1">
+                <a:solidFill>
+                  <a:srgbClr val="F8FAFC"/>
+                </a:solidFill>
+                <a:latin typeface="Trebuchet MS"/>
+              </a:defRPr>
+            </a:pPr>
+            <a:r>
+              <a:t>The Ask: Transitioning from Staging to Commercial Launch</a:t>
+            </a:r>
+          </a:p>
+        </p:txBody>
+      </p:sp>
+      <p:sp>
+        <p:nvSpPr>
+          <p:cNvPr id="6" name="Rounded Rectangle 5"/>
+          <p:cNvSpPr/>
+          <p:nvPr/>
+        </p:nvSpPr>
+        <p:spPr>
+          <a:xfrm>
+            <a:off x="731520" y="1645920"/>
+            <a:ext cx="10698480" cy="1463040"/>
+          </a:xfrm>
+          <a:prstGeom prst="roundRect">
+            <a:avLst/>
+          </a:prstGeom>
+          <a:solidFill>
+            <a:srgbClr val="101828"/>
+          </a:solidFill>
+          <a:ln w="19050">
+            <a:solidFill>
+              <a:srgbClr val="F59E0B"/>
+            </a:solidFill>
+          </a:ln>
+        </p:spPr>
+        <p:style>
+          <a:lnRef idx="1">
+            <a:schemeClr val="accent1"/>
+          </a:lnRef>
+          <a:fillRef idx="3">
+            <a:schemeClr val="accent1"/>
+          </a:fillRef>
+          <a:effectRef idx="2">
+            <a:schemeClr val="accent1"/>
+          </a:effectRef>
+          <a:fontRef idx="minor">
+            <a:schemeClr val="lt1"/>
+          </a:fontRef>
+        </p:style>
+        <p:txBody>
+          <a:bodyPr rtlCol="0" anchor="ctr" wrap="square"/>
+          <a:lstStyle/>
+          <a:p>
             <a:pPr algn="ctr">
-              <a:defRPr sz="1300" b="1">
-                <a:solidFill>
-                  <a:srgbClr val="38BDF8"/>
-                </a:solidFill>
-              </a:defRPr>
-            </a:pPr>
-            <a:r>
-              <a:t>Cloud Infrastructure (30%)</a:t>
+              <a:defRPr sz="2000" b="1">
+                <a:solidFill>
+                  <a:srgbClr val="F59E0B"/>
+                </a:solidFill>
+                <a:latin typeface="Trebuchet MS"/>
+              </a:defRPr>
+            </a:pPr>
+            <a:r>
+              <a:t>Capital Requirement: Seed Infrastructure &amp; Merchant Expansion</a:t>
             </a:r>
           </a:p>
           <a:p>
@@ -5779,14 +6992,15 @@
               <a:spcBef>
                 <a:spcPts val="600"/>
               </a:spcBef>
-              <a:defRPr sz="1050">
-                <a:solidFill>
-                  <a:srgbClr val="94A3B8"/>
-                </a:solidFill>
-              </a:defRPr>
-            </a:pPr>
-            <a:r>
-              <a:t>Render paid web services, MongoDB Atlas dedicated cluster, auto-scaling, and Redis caching.</a:t>
+              <a:defRPr sz="1300">
+                <a:solidFill>
+                  <a:srgbClr val="F8FAFC"/>
+                </a:solidFill>
+                <a:latin typeface="Segoe UI"/>
+              </a:defRPr>
+            </a:pPr>
+            <a:r>
+              <a:t>The product code is 100% complete across all 5 portals with zero technical debt. Capital is strictly deployed for production infrastructure (Render Paid Web Services, MongoDB Atlas M10 dedicated cluster) and merchant onboarding acquisition.</a:t>
             </a:r>
           </a:p>
         </p:txBody>
@@ -5799,14 +7013,14 @@
         </p:nvSpPr>
         <p:spPr>
           <a:xfrm>
-            <a:off x="3429000" y="3566160"/>
-            <a:ext cx="2560320" cy="2560320"/>
+            <a:off x="731520" y="3337560"/>
+            <a:ext cx="2560320" cy="2926080"/>
           </a:xfrm>
           <a:prstGeom prst="roundRect">
             <a:avLst/>
           </a:prstGeom>
           <a:solidFill>
-            <a:srgbClr val="0F172A"/>
+            <a:srgbClr val="101828"/>
           </a:solidFill>
           <a:ln>
             <a:solidFill>
@@ -5829,7 +7043,7 @@
           </a:fontRef>
         </p:style>
         <p:txBody>
-          <a:bodyPr rtlCol="0" anchor="ctr"/>
+          <a:bodyPr rtlCol="0" anchor="ctr" wrap="square"/>
           <a:lstStyle/>
           <a:p>
             <a:pPr algn="ctr">
@@ -5837,10 +7051,11 @@
                 <a:solidFill>
                   <a:srgbClr val="38BDF8"/>
                 </a:solidFill>
-              </a:defRPr>
-            </a:pPr>
-            <a:r>
-              <a:t>Voice AI &amp; Telephony (25%)</a:t>
+                <a:latin typeface="Trebuchet MS"/>
+              </a:defRPr>
+            </a:pPr>
+            <a:r>
+              <a:t>Cloud Infrastructure (30%)</a:t>
             </a:r>
           </a:p>
           <a:p>
@@ -5848,14 +7063,15 @@
               <a:spcBef>
                 <a:spcPts val="600"/>
               </a:spcBef>
-              <a:defRPr sz="1050">
+              <a:defRPr sz="1100">
                 <a:solidFill>
                   <a:srgbClr val="94A3B8"/>
                 </a:solidFill>
-              </a:defRPr>
-            </a:pPr>
-            <a:r>
-              <a:t>Vapi AI conversational voice calling minutes and Twilio WhatsApp messaging quotas.</a:t>
+                <a:latin typeface="Segoe UI"/>
+              </a:defRPr>
+            </a:pPr>
+            <a:r>
+              <a:t>Render paid web services, MongoDB Atlas dedicated cluster, auto-scaling, and Redis caching.</a:t>
             </a:r>
           </a:p>
         </p:txBody>
@@ -5868,14 +7084,14 @@
         </p:nvSpPr>
         <p:spPr>
           <a:xfrm>
-            <a:off x="6126480" y="3566160"/>
-            <a:ext cx="2560320" cy="2560320"/>
+            <a:off x="3429000" y="3337560"/>
+            <a:ext cx="2560320" cy="2926080"/>
           </a:xfrm>
           <a:prstGeom prst="roundRect">
             <a:avLst/>
           </a:prstGeom>
           <a:solidFill>
-            <a:srgbClr val="0F172A"/>
+            <a:srgbClr val="101828"/>
           </a:solidFill>
           <a:ln>
             <a:solidFill>
@@ -5898,18 +7114,19 @@
           </a:fontRef>
         </p:style>
         <p:txBody>
-          <a:bodyPr rtlCol="0" anchor="ctr"/>
+          <a:bodyPr rtlCol="0" anchor="ctr" wrap="square"/>
           <a:lstStyle/>
           <a:p>
             <a:pPr algn="ctr">
               <a:defRPr sz="1300" b="1">
                 <a:solidFill>
-                  <a:srgbClr val="38BDF8"/>
-                </a:solidFill>
-              </a:defRPr>
-            </a:pPr>
-            <a:r>
-              <a:t>Merchant Acquisition (35%)</a:t>
+                  <a:srgbClr val="F59E0B"/>
+                </a:solidFill>
+                <a:latin typeface="Trebuchet MS"/>
+              </a:defRPr>
+            </a:pPr>
+            <a:r>
+              <a:t>Voice AI &amp; Telephony (25%)</a:t>
             </a:r>
           </a:p>
           <a:p>
@@ -5917,14 +7134,15 @@
               <a:spcBef>
                 <a:spcPts val="600"/>
               </a:spcBef>
-              <a:defRPr sz="1050">
+              <a:defRPr sz="1100">
                 <a:solidFill>
                   <a:srgbClr val="94A3B8"/>
                 </a:solidFill>
-              </a:defRPr>
-            </a:pPr>
-            <a:r>
-              <a:t>Direct kirana onboarding drives, wholesale mandi partnerships, and merchant trade shows.</a:t>
+                <a:latin typeface="Segoe UI"/>
+              </a:defRPr>
+            </a:pPr>
+            <a:r>
+              <a:t>Vapi AI conversational voice calling minutes and Twilio WhatsApp messaging quotas.</a:t>
             </a:r>
           </a:p>
         </p:txBody>
@@ -5937,14 +7155,14 @@
         </p:nvSpPr>
         <p:spPr>
           <a:xfrm>
-            <a:off x="8823960" y="3566160"/>
-            <a:ext cx="2560320" cy="2560320"/>
+            <a:off x="6126480" y="3337560"/>
+            <a:ext cx="2560320" cy="2926080"/>
           </a:xfrm>
           <a:prstGeom prst="roundRect">
             <a:avLst/>
           </a:prstGeom>
           <a:solidFill>
-            <a:srgbClr val="0F172A"/>
+            <a:srgbClr val="101828"/>
           </a:solidFill>
           <a:ln>
             <a:solidFill>
@@ -5967,18 +7185,19 @@
           </a:fontRef>
         </p:style>
         <p:txBody>
-          <a:bodyPr rtlCol="0" anchor="ctr"/>
+          <a:bodyPr rtlCol="0" anchor="ctr" wrap="square"/>
           <a:lstStyle/>
           <a:p>
             <a:pPr algn="ctr">
               <a:defRPr sz="1300" b="1">
                 <a:solidFill>
-                  <a:srgbClr val="38BDF8"/>
-                </a:solidFill>
-              </a:defRPr>
-            </a:pPr>
-            <a:r>
-              <a:t>DevOps &amp; Reliability (10%)</a:t>
+                  <a:srgbClr val="10B981"/>
+                </a:solidFill>
+                <a:latin typeface="Trebuchet MS"/>
+              </a:defRPr>
+            </a:pPr>
+            <a:r>
+              <a:t>Merchant Acquisition (35%)</a:t>
             </a:r>
           </a:p>
           <a:p>
@@ -5986,14 +7205,286 @@
               <a:spcBef>
                 <a:spcPts val="600"/>
               </a:spcBef>
-              <a:defRPr sz="1050">
+              <a:defRPr sz="1100">
                 <a:solidFill>
                   <a:srgbClr val="94A3B8"/>
                 </a:solidFill>
+                <a:latin typeface="Segoe UI"/>
+              </a:defRPr>
+            </a:pPr>
+            <a:r>
+              <a:t>Direct kirana onboarding drives, wholesale mandi partnerships, and merchant trade shows.</a:t>
+            </a:r>
+          </a:p>
+        </p:txBody>
+      </p:sp>
+      <p:sp>
+        <p:nvSpPr>
+          <p:cNvPr id="10" name="Rounded Rectangle 9"/>
+          <p:cNvSpPr/>
+          <p:nvPr/>
+        </p:nvSpPr>
+        <p:spPr>
+          <a:xfrm>
+            <a:off x="8823960" y="3337560"/>
+            <a:ext cx="2560320" cy="2926080"/>
+          </a:xfrm>
+          <a:prstGeom prst="roundRect">
+            <a:avLst/>
+          </a:prstGeom>
+          <a:solidFill>
+            <a:srgbClr val="101828"/>
+          </a:solidFill>
+          <a:ln>
+            <a:solidFill>
+              <a:srgbClr val="1E293B"/>
+            </a:solidFill>
+          </a:ln>
+        </p:spPr>
+        <p:style>
+          <a:lnRef idx="1">
+            <a:schemeClr val="accent1"/>
+          </a:lnRef>
+          <a:fillRef idx="3">
+            <a:schemeClr val="accent1"/>
+          </a:fillRef>
+          <a:effectRef idx="2">
+            <a:schemeClr val="accent1"/>
+          </a:effectRef>
+          <a:fontRef idx="minor">
+            <a:schemeClr val="lt1"/>
+          </a:fontRef>
+        </p:style>
+        <p:txBody>
+          <a:bodyPr rtlCol="0" anchor="ctr" wrap="square"/>
+          <a:lstStyle/>
+          <a:p>
+            <a:pPr algn="ctr">
+              <a:defRPr sz="1300" b="1">
+                <a:solidFill>
+                  <a:srgbClr val="FDE68A"/>
+                </a:solidFill>
+                <a:latin typeface="Trebuchet MS"/>
+              </a:defRPr>
+            </a:pPr>
+            <a:r>
+              <a:t>DevOps &amp; Reliability (10%)</a:t>
+            </a:r>
+          </a:p>
+          <a:p>
+            <a:pPr>
+              <a:spcBef>
+                <a:spcPts val="600"/>
+              </a:spcBef>
+              <a:defRPr sz="1100">
+                <a:solidFill>
+                  <a:srgbClr val="94A3B8"/>
+                </a:solidFill>
+                <a:latin typeface="Segoe UI"/>
               </a:defRPr>
             </a:pPr>
             <a:r>
               <a:t>Security penetration testing, SOC2 compliance preparation, and 24/7 reliability operations.</a:t>
+            </a:r>
+          </a:p>
+        </p:txBody>
+      </p:sp>
+    </p:spTree>
+  </p:cSld>
+  <p:clrMapOvr>
+    <a:masterClrMapping/>
+  </p:clrMapOvr>
+</p:sld>
+</file>
+
+<file path=ppt/slides/slide9.xml><?xml version="1.0" encoding="utf-8"?>
+<p:sld xmlns:a="http://schemas.openxmlformats.org/drawingml/2006/main" xmlns:p="http://schemas.openxmlformats.org/presentationml/2006/main" xmlns:r="http://schemas.openxmlformats.org/officeDocument/2006/relationships">
+  <p:cSld>
+    <p:spTree>
+      <p:nvGrpSpPr>
+        <p:cNvPr id="1" name=""/>
+        <p:cNvGrpSpPr/>
+        <p:nvPr/>
+      </p:nvGrpSpPr>
+      <p:grpSpPr/>
+      <p:sp>
+        <p:nvSpPr>
+          <p:cNvPr id="2" name="Rectangle 1"/>
+          <p:cNvSpPr/>
+          <p:nvPr/>
+        </p:nvSpPr>
+        <p:spPr>
+          <a:xfrm>
+            <a:off x="0" y="0"/>
+            <a:ext cx="12191695" cy="6858000"/>
+          </a:xfrm>
+          <a:prstGeom prst="rect">
+            <a:avLst/>
+          </a:prstGeom>
+          <a:solidFill>
+            <a:srgbClr val="0A0E17"/>
+          </a:solidFill>
+          <a:ln>
+            <a:noFill/>
+          </a:ln>
+        </p:spPr>
+        <p:style>
+          <a:lnRef idx="1">
+            <a:schemeClr val="accent1"/>
+          </a:lnRef>
+          <a:fillRef idx="3">
+            <a:schemeClr val="accent1"/>
+          </a:fillRef>
+          <a:effectRef idx="2">
+            <a:schemeClr val="accent1"/>
+          </a:effectRef>
+          <a:fontRef idx="minor">
+            <a:schemeClr val="lt1"/>
+          </a:fontRef>
+        </p:style>
+        <p:txBody>
+          <a:bodyPr rtlCol="0" anchor="ctr"/>
+          <a:lstStyle/>
+          <a:p>
+            <a:pPr algn="ctr"/>
+          </a:p>
+        </p:txBody>
+      </p:sp>
+      <p:sp>
+        <p:nvSpPr>
+          <p:cNvPr id="3" name="Rectangle 2"/>
+          <p:cNvSpPr/>
+          <p:nvPr/>
+        </p:nvSpPr>
+        <p:spPr>
+          <a:xfrm>
+            <a:off x="0" y="0"/>
+            <a:ext cx="12191695" cy="73152"/>
+          </a:xfrm>
+          <a:prstGeom prst="rect">
+            <a:avLst/>
+          </a:prstGeom>
+          <a:solidFill>
+            <a:srgbClr val="F59E0B"/>
+          </a:solidFill>
+          <a:ln>
+            <a:noFill/>
+          </a:ln>
+        </p:spPr>
+        <p:style>
+          <a:lnRef idx="1">
+            <a:schemeClr val="accent1"/>
+          </a:lnRef>
+          <a:fillRef idx="3">
+            <a:schemeClr val="accent1"/>
+          </a:fillRef>
+          <a:effectRef idx="2">
+            <a:schemeClr val="accent1"/>
+          </a:effectRef>
+          <a:fontRef idx="minor">
+            <a:schemeClr val="lt1"/>
+          </a:fontRef>
+        </p:style>
+        <p:txBody>
+          <a:bodyPr rtlCol="0" anchor="ctr"/>
+          <a:lstStyle/>
+          <a:p>
+            <a:pPr algn="ctr"/>
+          </a:p>
+        </p:txBody>
+      </p:sp>
+      <p:sp>
+        <p:nvSpPr>
+          <p:cNvPr id="4" name="TextBox 3"/>
+          <p:cNvSpPr txBox="1"/>
+          <p:nvPr/>
+        </p:nvSpPr>
+        <p:spPr>
+          <a:xfrm>
+            <a:off x="914400" y="1645920"/>
+            <a:ext cx="10332720" cy="4114800"/>
+          </a:xfrm>
+          <a:prstGeom prst="rect">
+            <a:avLst/>
+          </a:prstGeom>
+          <a:noFill/>
+        </p:spPr>
+        <p:txBody>
+          <a:bodyPr wrap="square">
+            <a:spAutoFit/>
+          </a:bodyPr>
+          <a:lstStyle/>
+          <a:p>
+            <a:pPr>
+              <a:defRPr sz="3800" b="1">
+                <a:solidFill>
+                  <a:srgbClr val="F59E0B"/>
+                </a:solidFill>
+                <a:latin typeface="Trebuchet MS"/>
+              </a:defRPr>
+            </a:pPr>
+            <a:r>
+              <a:t>EXPERIENCE BIZORA AI LIVE TODAY</a:t>
+            </a:r>
+          </a:p>
+          <a:p>
+            <a:pPr>
+              <a:spcBef>
+                <a:spcPts val="1000"/>
+              </a:spcBef>
+              <a:defRPr sz="2200" b="1">
+                <a:solidFill>
+                  <a:srgbClr val="F8FAFC"/>
+                </a:solidFill>
+                <a:latin typeface="Trebuchet MS"/>
+              </a:defRPr>
+            </a:pPr>
+            <a:r>
+              <a:t>Transforming Indian Retail, One Kirana Store At A Time.</a:t>
+            </a:r>
+          </a:p>
+          <a:p>
+            <a:pPr>
+              <a:spcBef>
+                <a:spcPts val="1600"/>
+              </a:spcBef>
+              <a:defRPr sz="1400">
+                <a:solidFill>
+                  <a:srgbClr val="38BDF8"/>
+                </a:solidFill>
+                <a:latin typeface="Segoe UI"/>
+              </a:defRPr>
+            </a:pPr>
+            <a:r>
+              <a:t>• Store Owner Portal: https://bizora-owner.onrender.com</a:t>
+            </a:r>
+            <a:br/>
+            <a:r>
+              <a:t>• Customer Storefront: https://bizora-customer.onrender.com</a:t>
+            </a:r>
+            <a:br/>
+            <a:r>
+              <a:t>• Supplier Hub: https://bizora-supplier.onrender.com</a:t>
+            </a:r>
+            <a:br/>
+            <a:r>
+              <a:t>• Super Admin Console: https://bizora-admin.onrender.com</a:t>
+            </a:r>
+          </a:p>
+          <a:p>
+            <a:pPr>
+              <a:spcBef>
+                <a:spcPts val="2000"/>
+              </a:spcBef>
+              <a:defRPr sz="1400" b="1">
+                <a:solidFill>
+                  <a:srgbClr val="10B981"/>
+                </a:solidFill>
+                <a:latin typeface="Segoe UI"/>
+              </a:defRPr>
+            </a:pPr>
+            <a:r>
+              <a:t>Founder Contact: khade8915@gmail.com  |  Thank You &amp; Open for Questions</a:t>
             </a:r>
           </a:p>
         </p:txBody>
